--- a/courses/learn_floorplanning/module03-01-simulated-annealing-fp/slides.pptx
+++ b/courses/learn_floorplanning/module03-01-simulated-annealing-fp/slides.pptx
@@ -11,6 +11,10 @@
     <p:sldId id="259" r:id="rId11"/>
     <p:sldId id="260" r:id="rId12"/>
     <p:sldId id="261" r:id="rId13"/>
+    <p:sldId id="262" r:id="rId14"/>
+    <p:sldId id="263" r:id="rId15"/>
+    <p:sldId id="264" r:id="rId16"/>
+    <p:sldId id="265" r:id="rId17"/>
   </p:sldIdLst>
   <p:sldSz cx="12191695" cy="6858000" type="screen4x3"/>
   <p:notesSz cx="6858000" cy="9144000"/>
@@ -507,7 +511,83 @@
           <a:lstStyle/>
           <a:p>
             <a:r>
-              <a:t>Representations give you a packing. Search finds a good one under a fixed outline. Simulated annealing perturbs the representation—swap modules, rotate, change a tree edge or sequence—and accepts uphill moves early so you escape local minima. Cost usually mixes outline overflow, deadspace, and a wirelength proxy.</a:t>
+              <a:t>Toy cost adds one thousand when a packing is illegal. The bad overflow seed sits near one thousand forty-four; the golden legal packing scores about thirty-six. Annealing should move toward legal, lower cost.</a:t>
+            </a:r>
+          </a:p>
+          <a:p/>
+          <a:p>
+            <a:r>
+              <a:t>&lt;!-- algorithm-walkthrough --&gt;</a:t>
+            </a:r>
+          </a:p>
+        </p:txBody>
+      </p:sp>
+      <p:sp>
+        <p:nvSpPr>
+          <p:cNvPr id="4" name="Slide Number Placeholder 3"/>
+          <p:cNvSpPr>
+            <a:spLocks noGrp="1"/>
+          </p:cNvSpPr>
+          <p:nvPr>
+            <p:ph type="sldNum" idx="5" sz="quarter"/>
+          </p:nvPr>
+        </p:nvSpPr>
+        <p:spPr/>
+      </p:sp>
+    </p:spTree>
+  </p:cSld>
+  <p:clrMapOvr>
+    <a:masterClrMapping/>
+  </p:clrMapOvr>
+</p:notes>
+</file>
+
+<file path=ppt/notesSlides/notesSlide10.xml><?xml version="1.0" encoding="utf-8"?>
+<p:notes xmlns:a="http://schemas.openxmlformats.org/drawingml/2006/main" xmlns:p="http://schemas.openxmlformats.org/presentationml/2006/main" xmlns:r="http://schemas.openxmlformats.org/officeDocument/2006/relationships">
+  <p:cSld>
+    <p:spTree>
+      <p:nvGrpSpPr>
+        <p:cNvPr id="1" name=""/>
+        <p:cNvGrpSpPr/>
+        <p:nvPr/>
+      </p:nvGrpSpPr>
+      <p:grpSpPr>
+        <a:xfrm>
+          <a:off x="0" y="0"/>
+          <a:ext cx="0" cy="0"/>
+          <a:chOff x="0" y="0"/>
+          <a:chExt cx="0" cy="0"/>
+        </a:xfrm>
+      </p:grpSpPr>
+      <p:sp>
+        <p:nvSpPr>
+          <p:cNvPr id="2" name="Slide Image Placeholder 1"/>
+          <p:cNvSpPr>
+            <a:spLocks noGrp="1"/>
+          </p:cNvSpPr>
+          <p:nvPr>
+            <p:ph type="sldImg" idx="2"/>
+          </p:nvPr>
+        </p:nvSpPr>
+        <p:spPr/>
+      </p:sp>
+      <p:sp>
+        <p:nvSpPr>
+          <p:cNvPr id="3" name="Notes Placeholder 2"/>
+          <p:cNvSpPr>
+            <a:spLocks noGrp="1"/>
+          </p:cNvSpPr>
+          <p:nvPr>
+            <p:ph type="body" idx="3" sz="quarter"/>
+          </p:nvPr>
+        </p:nvSpPr>
+        <p:spPr/>
+        <p:txBody>
+          <a:bodyPr/>
+          <a:lstStyle/>
+          <a:p>
+            <a:r>
+              <a:t>Demonstrate one improve step from bad to golden. Next: soft module A reshaped from three by two to two by three.</a:t>
             </a:r>
           </a:p>
         </p:txBody>
@@ -577,7 +657,7 @@
           <a:lstStyle/>
           <a:p>
             <a:r>
-              <a:t>Pick a representation you already trust: slicing, B*, or sequence pair. Define moves that stay in that encoding. At temperature T, accept worse costs with probability related to exp of minus delta over T. Cool on a schedule. Always re-pack and re-score after a move. Illegal overflow should cost heavily so the search prefers legal packings.</a:t>
+              <a:t>Our toy cost adds one thousand when the packing is illegal. The bad overflow seed therefore sits at cost about one thousand forty-four—dominated by the penalty.</a:t>
             </a:r>
           </a:p>
         </p:txBody>
@@ -647,7 +727,7 @@
           <a:lstStyle/>
           <a:p>
             <a:r>
-              <a:t>Open **simulated-annealing-fp**. Run a short anneal on the starter instance. Watch cost and temperature. Pause, inspect the current packing, then continue. Try a hotter start versus a greedy low temperature. Then implement a tiny SA loop yourself with a fixed seed.</a:t>
+              <a:t>The golden legal packing drops below the penalty floor. Cost is about thirty-six—deadspace and a small HPWL proxy, no illegality tax.</a:t>
             </a:r>
           </a:p>
         </p:txBody>
@@ -717,7 +797,7 @@
           <a:lstStyle/>
           <a:p>
             <a:r>
-              <a:t>Wire SA around one representation. Log temperature, cost, and best packing. Use a deterministic RNG seed. Stop after a modest iteration budget on the toy outline—this is literacy, not overnight runs. Export the best coordinates and deadspace.</a:t>
+              <a:t>A simple SA move swaps the lower-left corners of two modules while keeping sizes. Accept improving moves; accept worsening ones with temperature probability.</a:t>
             </a:r>
           </a:p>
         </p:txBody>
@@ -787,7 +867,7 @@
           <a:lstStyle/>
           <a:p>
             <a:r>
-              <a:t>Moves that don’t change the packing waste iterations. A cost that ignores overflow will “optimize” illegal layouts. Cooling too fast freezes a bad packing; cooling too slow teaches nothing on a five-module toy. Also don’t compare costs across different outline penalties without documenting the weights.</a:t>
+              <a:t>One teaching “improve” step replaces the illegal seed with the golden packing. Cost falls below one thousand and legality flips to true—exactly what a cooling schedule should prefer.</a:t>
             </a:r>
           </a:p>
         </p:txBody>
@@ -857,7 +937,223 @@
           <a:lstStyle/>
           <a:p>
             <a:r>
-              <a:t>Get SA to improve deadspace or wirelength proxy from a random start while staying legal. Next: soft modules—resize aspect under area constraints.</a:t>
+              <a:t>Annealing is only as good as the move set. Pair it with polish, B-star, or sequence-pair edits—plus soft sizing and macros—in the labs that follow.</a:t>
+            </a:r>
+          </a:p>
+          <a:p/>
+          <a:p>
+            <a:r>
+              <a:t>&lt;!-- /algorithm-walkthrough --&gt;</a:t>
+            </a:r>
+          </a:p>
+        </p:txBody>
+      </p:sp>
+      <p:sp>
+        <p:nvSpPr>
+          <p:cNvPr id="4" name="Slide Number Placeholder 3"/>
+          <p:cNvSpPr>
+            <a:spLocks noGrp="1"/>
+          </p:cNvSpPr>
+          <p:nvPr>
+            <p:ph type="sldNum" idx="5" sz="quarter"/>
+          </p:nvPr>
+        </p:nvSpPr>
+        <p:spPr/>
+      </p:sp>
+    </p:spTree>
+  </p:cSld>
+  <p:clrMapOvr>
+    <a:masterClrMapping/>
+  </p:clrMapOvr>
+</p:notes>
+</file>
+
+<file path=ppt/notesSlides/notesSlide7.xml><?xml version="1.0" encoding="utf-8"?>
+<p:notes xmlns:a="http://schemas.openxmlformats.org/drawingml/2006/main" xmlns:p="http://schemas.openxmlformats.org/presentationml/2006/main" xmlns:r="http://schemas.openxmlformats.org/officeDocument/2006/relationships">
+  <p:cSld>
+    <p:spTree>
+      <p:nvGrpSpPr>
+        <p:cNvPr id="1" name=""/>
+        <p:cNvGrpSpPr/>
+        <p:nvPr/>
+      </p:nvGrpSpPr>
+      <p:grpSpPr>
+        <a:xfrm>
+          <a:off x="0" y="0"/>
+          <a:ext cx="0" cy="0"/>
+          <a:chOff x="0" y="0"/>
+          <a:chExt cx="0" cy="0"/>
+        </a:xfrm>
+      </p:grpSpPr>
+      <p:sp>
+        <p:nvSpPr>
+          <p:cNvPr id="2" name="Slide Image Placeholder 1"/>
+          <p:cNvSpPr>
+            <a:spLocks noGrp="1"/>
+          </p:cNvSpPr>
+          <p:nvPr>
+            <p:ph type="sldImg" idx="2"/>
+          </p:nvPr>
+        </p:nvSpPr>
+        <p:spPr/>
+      </p:sp>
+      <p:sp>
+        <p:nvSpPr>
+          <p:cNvPr id="3" name="Notes Placeholder 2"/>
+          <p:cNvSpPr>
+            <a:spLocks noGrp="1"/>
+          </p:cNvSpPr>
+          <p:nvPr>
+            <p:ph type="body" idx="3" sz="quarter"/>
+          </p:nvPr>
+        </p:nvSpPr>
+        <p:spPr/>
+        <p:txBody>
+          <a:bodyPr/>
+          <a:lstStyle/>
+          <a:p>
+            <a:r>
+              <a:t>Open simulated-annealing-fp. Show bad, note cost at least one thousand. Show golden or Improve—cost drops below one thousand and legality becomes true.</a:t>
+            </a:r>
+          </a:p>
+        </p:txBody>
+      </p:sp>
+      <p:sp>
+        <p:nvSpPr>
+          <p:cNvPr id="4" name="Slide Number Placeholder 3"/>
+          <p:cNvSpPr>
+            <a:spLocks noGrp="1"/>
+          </p:cNvSpPr>
+          <p:nvPr>
+            <p:ph type="sldNum" idx="5" sz="quarter"/>
+          </p:nvPr>
+        </p:nvSpPr>
+        <p:spPr/>
+      </p:sp>
+    </p:spTree>
+  </p:cSld>
+  <p:clrMapOvr>
+    <a:masterClrMapping/>
+  </p:clrMapOvr>
+</p:notes>
+</file>
+
+<file path=ppt/notesSlides/notesSlide8.xml><?xml version="1.0" encoding="utf-8"?>
+<p:notes xmlns:a="http://schemas.openxmlformats.org/drawingml/2006/main" xmlns:p="http://schemas.openxmlformats.org/presentationml/2006/main" xmlns:r="http://schemas.openxmlformats.org/officeDocument/2006/relationships">
+  <p:cSld>
+    <p:spTree>
+      <p:nvGrpSpPr>
+        <p:cNvPr id="1" name=""/>
+        <p:cNvGrpSpPr/>
+        <p:nvPr/>
+      </p:nvGrpSpPr>
+      <p:grpSpPr>
+        <a:xfrm>
+          <a:off x="0" y="0"/>
+          <a:ext cx="0" cy="0"/>
+          <a:chOff x="0" y="0"/>
+          <a:chExt cx="0" cy="0"/>
+        </a:xfrm>
+      </p:grpSpPr>
+      <p:sp>
+        <p:nvSpPr>
+          <p:cNvPr id="2" name="Slide Image Placeholder 1"/>
+          <p:cNvSpPr>
+            <a:spLocks noGrp="1"/>
+          </p:cNvSpPr>
+          <p:nvPr>
+            <p:ph type="sldImg" idx="2"/>
+          </p:nvPr>
+        </p:nvSpPr>
+        <p:spPr/>
+      </p:sp>
+      <p:sp>
+        <p:nvSpPr>
+          <p:cNvPr id="3" name="Notes Placeholder 2"/>
+          <p:cNvSpPr>
+            <a:spLocks noGrp="1"/>
+          </p:cNvSpPr>
+          <p:nvPr>
+            <p:ph type="body" idx="3" sz="quarter"/>
+          </p:nvPr>
+        </p:nvSpPr>
+        <p:spPr/>
+        <p:txBody>
+          <a:bodyPr/>
+          <a:lstStyle/>
+          <a:p>
+            <a:r>
+              <a:t>Implement cost with an illegality penalty, plus deadspace and HPWL terms. Assert cost(golden) is less than cost(bad), and saSwap only exchanges coordinates.</a:t>
+            </a:r>
+          </a:p>
+        </p:txBody>
+      </p:sp>
+      <p:sp>
+        <p:nvSpPr>
+          <p:cNvPr id="4" name="Slide Number Placeholder 3"/>
+          <p:cNvSpPr>
+            <a:spLocks noGrp="1"/>
+          </p:cNvSpPr>
+          <p:nvPr>
+            <p:ph type="sldNum" idx="5" sz="quarter"/>
+          </p:nvPr>
+        </p:nvSpPr>
+        <p:spPr/>
+      </p:sp>
+    </p:spTree>
+  </p:cSld>
+  <p:clrMapOvr>
+    <a:masterClrMapping/>
+  </p:clrMapOvr>
+</p:notes>
+</file>
+
+<file path=ppt/notesSlides/notesSlide9.xml><?xml version="1.0" encoding="utf-8"?>
+<p:notes xmlns:a="http://schemas.openxmlformats.org/drawingml/2006/main" xmlns:p="http://schemas.openxmlformats.org/presentationml/2006/main" xmlns:r="http://schemas.openxmlformats.org/officeDocument/2006/relationships">
+  <p:cSld>
+    <p:spTree>
+      <p:nvGrpSpPr>
+        <p:cNvPr id="1" name=""/>
+        <p:cNvGrpSpPr/>
+        <p:nvPr/>
+      </p:nvGrpSpPr>
+      <p:grpSpPr>
+        <a:xfrm>
+          <a:off x="0" y="0"/>
+          <a:ext cx="0" cy="0"/>
+          <a:chOff x="0" y="0"/>
+          <a:chExt cx="0" cy="0"/>
+        </a:xfrm>
+      </p:grpSpPr>
+      <p:sp>
+        <p:nvSpPr>
+          <p:cNvPr id="2" name="Slide Image Placeholder 1"/>
+          <p:cNvSpPr>
+            <a:spLocks noGrp="1"/>
+          </p:cNvSpPr>
+          <p:nvPr>
+            <p:ph type="sldImg" idx="2"/>
+          </p:nvPr>
+        </p:nvSpPr>
+        <p:spPr/>
+      </p:sp>
+      <p:sp>
+        <p:nvSpPr>
+          <p:cNvPr id="3" name="Notes Placeholder 2"/>
+          <p:cNvSpPr>
+            <a:spLocks noGrp="1"/>
+          </p:cNvSpPr>
+          <p:nvPr>
+            <p:ph type="body" idx="3" sz="quarter"/>
+          </p:nvPr>
+        </p:nvSpPr>
+        <p:spPr/>
+        <p:txBody>
+          <a:bodyPr/>
+          <a:lstStyle/>
+          <a:p>
+            <a:r>
+              <a:t>Accepting illegal states without penalty; forgetting to rescore after a swap; cooling so fast you never escape the bad seed.</a:t>
             </a:r>
           </a:p>
         </p:txBody>
@@ -3900,7 +4196,7 @@
                 </a:solidFill>
                 <a:latin typeface="Calibri"/>
               </a:rPr>
-              <a:t>Simulated annealing search</a:t>
+              <a:t>Simulated annealing floorplan search</a:t>
             </a:r>
           </a:p>
           <a:p>
@@ -3919,7 +4215,7 @@
                 </a:solidFill>
                 <a:latin typeface="Calibri"/>
               </a:rPr>
-              <a:t>Representations give you a packing</a:t>
+              <a:t>Toy cost adds one thousand when a packing is illegal</a:t>
             </a:r>
           </a:p>
         </p:txBody>
@@ -3927,6 +4223,169 @@
       <p:sp>
         <p:nvSpPr>
           <p:cNvPr id="3" name="TextBox 2"/>
+          <p:cNvSpPr txBox="1"/>
+          <p:nvPr/>
+        </p:nvSpPr>
+        <p:spPr>
+          <a:xfrm>
+            <a:off x="548640" y="6355080"/>
+            <a:ext cx="11064240" cy="320040"/>
+          </a:xfrm>
+          <a:prstGeom prst="rect">
+            <a:avLst/>
+          </a:prstGeom>
+          <a:noFill/>
+        </p:spPr>
+        <p:txBody>
+          <a:bodyPr wrap="square">
+            <a:noAutofit/>
+          </a:bodyPr>
+          <a:lstStyle/>
+          <a:p>
+            <a:pPr algn="r">
+              <a:lnSpc>
+                <a:spcPts val="2200"/>
+              </a:lnSpc>
+              <a:defRPr sz="1000" b="0">
+                <a:solidFill>
+                  <a:srgbClr val="666666"/>
+                </a:solidFill>
+                <a:latin typeface="Calibri"/>
+              </a:defRPr>
+            </a:pPr>
+            <a:r>
+              <a:t>learn_floorplanning — 01 simulated annealing fp</a:t>
+            </a:r>
+          </a:p>
+        </p:txBody>
+      </p:sp>
+    </p:spTree>
+  </p:cSld>
+  <p:clrMapOvr>
+    <a:masterClrMapping/>
+  </p:clrMapOvr>
+</p:sld>
+</file>
+
+<file path=ppt/slides/slide10.xml><?xml version="1.0" encoding="utf-8"?>
+<p:sld xmlns:a="http://schemas.openxmlformats.org/drawingml/2006/main" xmlns:p="http://schemas.openxmlformats.org/presentationml/2006/main" xmlns:r="http://schemas.openxmlformats.org/officeDocument/2006/relationships">
+  <p:cSld>
+    <p:spTree>
+      <p:nvGrpSpPr>
+        <p:cNvPr id="1" name=""/>
+        <p:cNvGrpSpPr/>
+        <p:nvPr/>
+      </p:nvGrpSpPr>
+      <p:grpSpPr/>
+      <p:sp>
+        <p:nvSpPr>
+          <p:cNvPr id="2" name="TextBox 1"/>
+          <p:cNvSpPr txBox="1"/>
+          <p:nvPr/>
+        </p:nvSpPr>
+        <p:spPr>
+          <a:xfrm>
+            <a:off x="548640" y="411480"/>
+            <a:ext cx="11064240" cy="777240"/>
+          </a:xfrm>
+          <a:prstGeom prst="rect">
+            <a:avLst/>
+          </a:prstGeom>
+          <a:noFill/>
+        </p:spPr>
+        <p:txBody>
+          <a:bodyPr wrap="square">
+            <a:noAutofit/>
+          </a:bodyPr>
+          <a:lstStyle/>
+          <a:p>
+            <a:pPr>
+              <a:lnSpc>
+                <a:spcPts val="2200"/>
+              </a:lnSpc>
+            </a:pPr>
+            <a:r>
+              <a:rPr sz="2800" b="1">
+                <a:solidFill>
+                  <a:srgbClr val="1A1A2E"/>
+                </a:solidFill>
+                <a:latin typeface="Calibri"/>
+              </a:rPr>
+              <a:t>Your turn</a:t>
+            </a:r>
+          </a:p>
+        </p:txBody>
+      </p:sp>
+      <p:sp>
+        <p:nvSpPr>
+          <p:cNvPr id="3" name="TextBox 2"/>
+          <p:cNvSpPr txBox="1"/>
+          <p:nvPr/>
+        </p:nvSpPr>
+        <p:spPr>
+          <a:xfrm>
+            <a:off x="548640" y="1234440"/>
+            <a:ext cx="11064240" cy="4937760"/>
+          </a:xfrm>
+          <a:prstGeom prst="rect">
+            <a:avLst/>
+          </a:prstGeom>
+          <a:noFill/>
+        </p:spPr>
+        <p:txBody>
+          <a:bodyPr wrap="square">
+            <a:noAutofit/>
+          </a:bodyPr>
+          <a:lstStyle/>
+          <a:p>
+            <a:pPr lvl="0" marL="457200" indent="-228600">
+              <a:buFont typeface="Calibri"/>
+              <a:spcAft>
+                <a:spcPts val="1000"/>
+              </a:spcAft>
+              <a:buSzPct val="100000"/>
+              <a:buChar char="•"/>
+              <a:lnSpc>
+                <a:spcPts val="2200"/>
+              </a:lnSpc>
+            </a:pPr>
+            <a:r>
+              <a:rPr sz="2000" b="0">
+                <a:solidFill>
+                  <a:srgbClr val="333333"/>
+                </a:solidFill>
+                <a:latin typeface="Calibri"/>
+              </a:rPr>
+              <a:t>Demonstrate one improve step from bad to golden</a:t>
+            </a:r>
+          </a:p>
+          <a:p>
+            <a:pPr lvl="0" marL="457200" indent="-228600">
+              <a:buFont typeface="Calibri"/>
+              <a:spcAft>
+                <a:spcPts val="1000"/>
+              </a:spcAft>
+              <a:buSzPct val="100000"/>
+              <a:buChar char="•"/>
+              <a:lnSpc>
+                <a:spcPts val="2200"/>
+              </a:lnSpc>
+            </a:pPr>
+            <a:r>
+              <a:rPr sz="2000" b="0">
+                <a:solidFill>
+                  <a:srgbClr val="333333"/>
+                </a:solidFill>
+                <a:latin typeface="Calibri"/>
+              </a:rPr>
+              <a:t>Next: soft module A reshaped from three by two to two by three</a:t>
+            </a:r>
+          </a:p>
+        </p:txBody>
+      </p:sp>
+      <p:sp>
+        <p:nvSpPr>
+          <p:cNvPr id="4" name="TextBox 3"/>
           <p:cNvSpPr txBox="1"/>
           <p:nvPr/>
         </p:nvSpPr>
@@ -4015,21 +4474,45 @@
                 </a:solidFill>
                 <a:latin typeface="Calibri"/>
               </a:rPr>
-              <a:t>The idea</a:t>
-            </a:r>
-          </a:p>
-        </p:txBody>
-      </p:sp>
-      <p:sp>
-        <p:nvSpPr>
-          <p:cNvPr id="3" name="TextBox 2"/>
+              <a:t>Illegal packs pay 1000</a:t>
+            </a:r>
+          </a:p>
+        </p:txBody>
+      </p:sp>
+      <p:pic>
+        <p:nvPicPr>
+          <p:cNvPr id="3" name="Picture 2" descr="01-bad-cost.png"/>
+          <p:cNvPicPr>
+            <a:picLocks noChangeAspect="1"/>
+          </p:cNvPicPr>
+          <p:nvPr/>
+        </p:nvPicPr>
+        <p:blipFill>
+          <a:blip r:embed="rId2"/>
+          <a:stretch>
+            <a:fillRect/>
+          </a:stretch>
+        </p:blipFill>
+        <p:spPr>
+          <a:xfrm>
+            <a:off x="548640" y="1143000"/>
+            <a:ext cx="9424736" cy="4572000"/>
+          </a:xfrm>
+          <a:prstGeom prst="rect">
+            <a:avLst/>
+          </a:prstGeom>
+        </p:spPr>
+      </p:pic>
+      <p:sp>
+        <p:nvSpPr>
+          <p:cNvPr id="4" name="TextBox 3"/>
           <p:cNvSpPr txBox="1"/>
           <p:nvPr/>
         </p:nvSpPr>
         <p:spPr>
           <a:xfrm>
-            <a:off x="548640" y="1234440"/>
-            <a:ext cx="11064240" cy="4937760"/>
+            <a:off x="548640" y="5897880"/>
+            <a:ext cx="11064240" cy="411480"/>
           </a:xfrm>
           <a:prstGeom prst="rect">
             <a:avLst/>
@@ -4042,142 +4525,26 @@
           </a:bodyPr>
           <a:lstStyle/>
           <a:p>
-            <a:pPr lvl="0" marL="457200" indent="-228600">
-              <a:buFont typeface="Calibri"/>
-              <a:spcAft>
-                <a:spcPts val="1000"/>
-              </a:spcAft>
-              <a:buSzPct val="100000"/>
-              <a:buChar char="•"/>
+            <a:pPr>
               <a:lnSpc>
                 <a:spcPts val="2200"/>
               </a:lnSpc>
             </a:pPr>
             <a:r>
-              <a:rPr sz="2000" b="0">
+              <a:rPr sz="1200" b="0">
                 <a:solidFill>
                   <a:srgbClr val="333333"/>
                 </a:solidFill>
                 <a:latin typeface="Calibri"/>
               </a:rPr>
-              <a:t>Pick a representation you already trust: slicing, B*, or sequence pair</a:t>
-            </a:r>
-          </a:p>
-          <a:p>
-            <a:pPr lvl="0" marL="457200" indent="-228600">
-              <a:buFont typeface="Calibri"/>
-              <a:spcAft>
-                <a:spcPts val="1000"/>
-              </a:spcAft>
-              <a:buSzPct val="100000"/>
-              <a:buChar char="•"/>
-              <a:lnSpc>
-                <a:spcPts val="2200"/>
-              </a:lnSpc>
-            </a:pPr>
-            <a:r>
-              <a:rPr sz="2000" b="0">
-                <a:solidFill>
-                  <a:srgbClr val="333333"/>
-                </a:solidFill>
-                <a:latin typeface="Calibri"/>
-              </a:rPr>
-              <a:t>Define moves that stay in that encoding</a:t>
-            </a:r>
-          </a:p>
-          <a:p>
-            <a:pPr lvl="0" marL="457200" indent="-228600">
-              <a:buFont typeface="Calibri"/>
-              <a:spcAft>
-                <a:spcPts val="1000"/>
-              </a:spcAft>
-              <a:buSzPct val="100000"/>
-              <a:buChar char="•"/>
-              <a:lnSpc>
-                <a:spcPts val="2200"/>
-              </a:lnSpc>
-            </a:pPr>
-            <a:r>
-              <a:rPr sz="2000" b="0">
-                <a:solidFill>
-                  <a:srgbClr val="333333"/>
-                </a:solidFill>
-                <a:latin typeface="Calibri"/>
-              </a:rPr>
-              <a:t>At temperature T, accept worse costs with probability related to exp of minus delta over T</a:t>
-            </a:r>
-          </a:p>
-          <a:p>
-            <a:pPr lvl="0" marL="457200" indent="-228600">
-              <a:buFont typeface="Calibri"/>
-              <a:spcAft>
-                <a:spcPts val="1000"/>
-              </a:spcAft>
-              <a:buSzPct val="100000"/>
-              <a:buChar char="•"/>
-              <a:lnSpc>
-                <a:spcPts val="2200"/>
-              </a:lnSpc>
-            </a:pPr>
-            <a:r>
-              <a:rPr sz="2000" b="0">
-                <a:solidFill>
-                  <a:srgbClr val="333333"/>
-                </a:solidFill>
-                <a:latin typeface="Calibri"/>
-              </a:rPr>
-              <a:t>Cool on a schedule</a:t>
-            </a:r>
-          </a:p>
-          <a:p>
-            <a:pPr lvl="0" marL="457200" indent="-228600">
-              <a:buFont typeface="Calibri"/>
-              <a:spcAft>
-                <a:spcPts val="1000"/>
-              </a:spcAft>
-              <a:buSzPct val="100000"/>
-              <a:buChar char="•"/>
-              <a:lnSpc>
-                <a:spcPts val="2200"/>
-              </a:lnSpc>
-            </a:pPr>
-            <a:r>
-              <a:rPr sz="2000" b="0">
-                <a:solidFill>
-                  <a:srgbClr val="333333"/>
-                </a:solidFill>
-                <a:latin typeface="Calibri"/>
-              </a:rPr>
-              <a:t>Always re-pack and re-score after a move</a:t>
-            </a:r>
-          </a:p>
-          <a:p>
-            <a:pPr lvl="0" marL="457200" indent="-228600">
-              <a:buFont typeface="Calibri"/>
-              <a:spcAft>
-                <a:spcPts val="1000"/>
-              </a:spcAft>
-              <a:buSzPct val="100000"/>
-              <a:buChar char="•"/>
-              <a:lnSpc>
-                <a:spcPts val="2200"/>
-              </a:lnSpc>
-            </a:pPr>
-            <a:r>
-              <a:rPr sz="2000" b="0">
-                <a:solidFill>
-                  <a:srgbClr val="333333"/>
-                </a:solidFill>
-                <a:latin typeface="Calibri"/>
-              </a:rPr>
-              <a:t>Illegal overflow should cost heavily so the search prefers legal packings</a:t>
-            </a:r>
-          </a:p>
-        </p:txBody>
-      </p:sp>
-      <p:sp>
-        <p:nvSpPr>
-          <p:cNvPr id="4" name="TextBox 3"/>
+              <a:t>Illegal packs pay 1000</a:t>
+            </a:r>
+          </a:p>
+        </p:txBody>
+      </p:sp>
+      <p:sp>
+        <p:nvSpPr>
+          <p:cNvPr id="5" name="TextBox 4"/>
           <p:cNvSpPr txBox="1"/>
           <p:nvPr/>
         </p:nvSpPr>
@@ -4266,21 +4633,45 @@
                 </a:solidFill>
                 <a:latin typeface="Calibri"/>
               </a:rPr>
-              <a:t>Browser lab track</a:t>
-            </a:r>
-          </a:p>
-        </p:txBody>
-      </p:sp>
-      <p:sp>
-        <p:nvSpPr>
-          <p:cNvPr id="3" name="TextBox 2"/>
+              <a:t>Golden cost stays under 1000</a:t>
+            </a:r>
+          </a:p>
+        </p:txBody>
+      </p:sp>
+      <p:pic>
+        <p:nvPicPr>
+          <p:cNvPr id="3" name="Picture 2" descr="02-golden-cost.png"/>
+          <p:cNvPicPr>
+            <a:picLocks noChangeAspect="1"/>
+          </p:cNvPicPr>
+          <p:nvPr/>
+        </p:nvPicPr>
+        <p:blipFill>
+          <a:blip r:embed="rId2"/>
+          <a:stretch>
+            <a:fillRect/>
+          </a:stretch>
+        </p:blipFill>
+        <p:spPr>
+          <a:xfrm>
+            <a:off x="548640" y="1143000"/>
+            <a:ext cx="9424736" cy="4572000"/>
+          </a:xfrm>
+          <a:prstGeom prst="rect">
+            <a:avLst/>
+          </a:prstGeom>
+        </p:spPr>
+      </p:pic>
+      <p:sp>
+        <p:nvSpPr>
+          <p:cNvPr id="4" name="TextBox 3"/>
           <p:cNvSpPr txBox="1"/>
           <p:nvPr/>
         </p:nvSpPr>
         <p:spPr>
           <a:xfrm>
-            <a:off x="548640" y="1234440"/>
-            <a:ext cx="11064240" cy="4937760"/>
+            <a:off x="548640" y="5897880"/>
+            <a:ext cx="11064240" cy="411480"/>
           </a:xfrm>
           <a:prstGeom prst="rect">
             <a:avLst/>
@@ -4293,151 +4684,26 @@
           </a:bodyPr>
           <a:lstStyle/>
           <a:p>
-            <a:pPr lvl="0" marL="457200" indent="-228600">
-              <a:buFont typeface="Calibri"/>
-              <a:spcAft>
-                <a:spcPts val="1000"/>
-              </a:spcAft>
-              <a:buSzPct val="100000"/>
-              <a:buChar char="•"/>
+            <a:pPr>
               <a:lnSpc>
                 <a:spcPts val="2200"/>
               </a:lnSpc>
             </a:pPr>
             <a:r>
-              <a:rPr sz="2000" b="0">
+              <a:rPr sz="1200" b="0">
                 <a:solidFill>
                   <a:srgbClr val="333333"/>
                 </a:solidFill>
                 <a:latin typeface="Calibri"/>
               </a:rPr>
-              <a:t>Open </a:t>
-            </a:r>
-            <a:r>
-              <a:rPr sz="2000" b="1">
-                <a:solidFill>
-                  <a:srgbClr val="333333"/>
-                </a:solidFill>
-                <a:latin typeface="Calibri"/>
-              </a:rPr>
-              <a:t>simulated-annealing-fp</a:t>
-            </a:r>
-          </a:p>
-          <a:p>
-            <a:pPr lvl="0" marL="457200" indent="-228600">
-              <a:buFont typeface="Calibri"/>
-              <a:spcAft>
-                <a:spcPts val="1000"/>
-              </a:spcAft>
-              <a:buSzPct val="100000"/>
-              <a:buChar char="•"/>
-              <a:lnSpc>
-                <a:spcPts val="2200"/>
-              </a:lnSpc>
-            </a:pPr>
-            <a:r>
-              <a:rPr sz="2000" b="0">
-                <a:solidFill>
-                  <a:srgbClr val="333333"/>
-                </a:solidFill>
-                <a:latin typeface="Calibri"/>
-              </a:rPr>
-              <a:t>Run a short anneal on the starter instance</a:t>
-            </a:r>
-          </a:p>
-          <a:p>
-            <a:pPr lvl="0" marL="457200" indent="-228600">
-              <a:buFont typeface="Calibri"/>
-              <a:spcAft>
-                <a:spcPts val="1000"/>
-              </a:spcAft>
-              <a:buSzPct val="100000"/>
-              <a:buChar char="•"/>
-              <a:lnSpc>
-                <a:spcPts val="2200"/>
-              </a:lnSpc>
-            </a:pPr>
-            <a:r>
-              <a:rPr sz="2000" b="0">
-                <a:solidFill>
-                  <a:srgbClr val="333333"/>
-                </a:solidFill>
-                <a:latin typeface="Calibri"/>
-              </a:rPr>
-              <a:t>Watch cost and temperature</a:t>
-            </a:r>
-          </a:p>
-          <a:p>
-            <a:pPr lvl="0" marL="457200" indent="-228600">
-              <a:buFont typeface="Calibri"/>
-              <a:spcAft>
-                <a:spcPts val="1000"/>
-              </a:spcAft>
-              <a:buSzPct val="100000"/>
-              <a:buChar char="•"/>
-              <a:lnSpc>
-                <a:spcPts val="2200"/>
-              </a:lnSpc>
-            </a:pPr>
-            <a:r>
-              <a:rPr sz="2000" b="0">
-                <a:solidFill>
-                  <a:srgbClr val="333333"/>
-                </a:solidFill>
-                <a:latin typeface="Calibri"/>
-              </a:rPr>
-              <a:t>Pause, inspect the current packing, then continue</a:t>
-            </a:r>
-          </a:p>
-          <a:p>
-            <a:pPr lvl="0" marL="457200" indent="-228600">
-              <a:buFont typeface="Calibri"/>
-              <a:spcAft>
-                <a:spcPts val="1000"/>
-              </a:spcAft>
-              <a:buSzPct val="100000"/>
-              <a:buChar char="•"/>
-              <a:lnSpc>
-                <a:spcPts val="2200"/>
-              </a:lnSpc>
-            </a:pPr>
-            <a:r>
-              <a:rPr sz="2000" b="0">
-                <a:solidFill>
-                  <a:srgbClr val="333333"/>
-                </a:solidFill>
-                <a:latin typeface="Calibri"/>
-              </a:rPr>
-              <a:t>Try a hotter start versus a greedy low temperature</a:t>
-            </a:r>
-          </a:p>
-          <a:p>
-            <a:pPr lvl="0" marL="457200" indent="-228600">
-              <a:buFont typeface="Calibri"/>
-              <a:spcAft>
-                <a:spcPts val="1000"/>
-              </a:spcAft>
-              <a:buSzPct val="100000"/>
-              <a:buChar char="•"/>
-              <a:lnSpc>
-                <a:spcPts val="2200"/>
-              </a:lnSpc>
-            </a:pPr>
-            <a:r>
-              <a:rPr sz="2000" b="0">
-                <a:solidFill>
-                  <a:srgbClr val="333333"/>
-                </a:solidFill>
-                <a:latin typeface="Calibri"/>
-              </a:rPr>
-              <a:t>Then implement a tiny SA loop yourself with a fixed seed</a:t>
-            </a:r>
-          </a:p>
-        </p:txBody>
-      </p:sp>
-      <p:sp>
-        <p:nvSpPr>
-          <p:cNvPr id="4" name="TextBox 3"/>
+              <a:t>Golden cost stays under 1000</a:t>
+            </a:r>
+          </a:p>
+        </p:txBody>
+      </p:sp>
+      <p:sp>
+        <p:nvSpPr>
+          <p:cNvPr id="5" name="TextBox 4"/>
           <p:cNvSpPr txBox="1"/>
           <p:nvPr/>
         </p:nvSpPr>
@@ -4526,21 +4792,45 @@
                 </a:solidFill>
                 <a:latin typeface="Calibri"/>
               </a:rPr>
-              <a:t>Implement track</a:t>
-            </a:r>
-          </a:p>
-        </p:txBody>
-      </p:sp>
-      <p:sp>
-        <p:nvSpPr>
-          <p:cNvPr id="3" name="TextBox 2"/>
+              <a:t>Neighbors swap module positions</a:t>
+            </a:r>
+          </a:p>
+        </p:txBody>
+      </p:sp>
+      <p:pic>
+        <p:nvPicPr>
+          <p:cNvPr id="3" name="Picture 2" descr="03-neighbor.png"/>
+          <p:cNvPicPr>
+            <a:picLocks noChangeAspect="1"/>
+          </p:cNvPicPr>
+          <p:nvPr/>
+        </p:nvPicPr>
+        <p:blipFill>
+          <a:blip r:embed="rId2"/>
+          <a:stretch>
+            <a:fillRect/>
+          </a:stretch>
+        </p:blipFill>
+        <p:spPr>
+          <a:xfrm>
+            <a:off x="548640" y="1143000"/>
+            <a:ext cx="9424736" cy="4572000"/>
+          </a:xfrm>
+          <a:prstGeom prst="rect">
+            <a:avLst/>
+          </a:prstGeom>
+        </p:spPr>
+      </p:pic>
+      <p:sp>
+        <p:nvSpPr>
+          <p:cNvPr id="4" name="TextBox 3"/>
           <p:cNvSpPr txBox="1"/>
           <p:nvPr/>
         </p:nvSpPr>
         <p:spPr>
           <a:xfrm>
-            <a:off x="548640" y="1234440"/>
-            <a:ext cx="11064240" cy="4937760"/>
+            <a:off x="548640" y="5897880"/>
+            <a:ext cx="11064240" cy="411480"/>
           </a:xfrm>
           <a:prstGeom prst="rect">
             <a:avLst/>
@@ -4553,120 +4843,26 @@
           </a:bodyPr>
           <a:lstStyle/>
           <a:p>
-            <a:pPr lvl="0" marL="457200" indent="-228600">
-              <a:buFont typeface="Calibri"/>
-              <a:spcAft>
-                <a:spcPts val="1000"/>
-              </a:spcAft>
-              <a:buSzPct val="100000"/>
-              <a:buChar char="•"/>
+            <a:pPr>
               <a:lnSpc>
                 <a:spcPts val="2200"/>
               </a:lnSpc>
             </a:pPr>
             <a:r>
-              <a:rPr sz="2000" b="0">
+              <a:rPr sz="1200" b="0">
                 <a:solidFill>
                   <a:srgbClr val="333333"/>
                 </a:solidFill>
                 <a:latin typeface="Calibri"/>
               </a:rPr>
-              <a:t>Wire SA around one representation</a:t>
-            </a:r>
-          </a:p>
-          <a:p>
-            <a:pPr lvl="0" marL="457200" indent="-228600">
-              <a:buFont typeface="Calibri"/>
-              <a:spcAft>
-                <a:spcPts val="1000"/>
-              </a:spcAft>
-              <a:buSzPct val="100000"/>
-              <a:buChar char="•"/>
-              <a:lnSpc>
-                <a:spcPts val="2200"/>
-              </a:lnSpc>
-            </a:pPr>
-            <a:r>
-              <a:rPr sz="2000" b="0">
-                <a:solidFill>
-                  <a:srgbClr val="333333"/>
-                </a:solidFill>
-                <a:latin typeface="Calibri"/>
-              </a:rPr>
-              <a:t>Log temperature, cost, and best packing</a:t>
-            </a:r>
-          </a:p>
-          <a:p>
-            <a:pPr lvl="0" marL="457200" indent="-228600">
-              <a:buFont typeface="Calibri"/>
-              <a:spcAft>
-                <a:spcPts val="1000"/>
-              </a:spcAft>
-              <a:buSzPct val="100000"/>
-              <a:buChar char="•"/>
-              <a:lnSpc>
-                <a:spcPts val="2200"/>
-              </a:lnSpc>
-            </a:pPr>
-            <a:r>
-              <a:rPr sz="2000" b="0">
-                <a:solidFill>
-                  <a:srgbClr val="333333"/>
-                </a:solidFill>
-                <a:latin typeface="Calibri"/>
-              </a:rPr>
-              <a:t>Use a deterministic RNG seed</a:t>
-            </a:r>
-          </a:p>
-          <a:p>
-            <a:pPr lvl="0" marL="457200" indent="-228600">
-              <a:buFont typeface="Calibri"/>
-              <a:spcAft>
-                <a:spcPts val="1000"/>
-              </a:spcAft>
-              <a:buSzPct val="100000"/>
-              <a:buChar char="•"/>
-              <a:lnSpc>
-                <a:spcPts val="2200"/>
-              </a:lnSpc>
-            </a:pPr>
-            <a:r>
-              <a:rPr sz="2000" b="0">
-                <a:solidFill>
-                  <a:srgbClr val="333333"/>
-                </a:solidFill>
-                <a:latin typeface="Calibri"/>
-              </a:rPr>
-              <a:t>Stop after a modest iteration budget on the toy outline</a:t>
-            </a:r>
-          </a:p>
-          <a:p>
-            <a:pPr lvl="0" marL="457200" indent="-228600">
-              <a:buFont typeface="Calibri"/>
-              <a:spcAft>
-                <a:spcPts val="1000"/>
-              </a:spcAft>
-              <a:buSzPct val="100000"/>
-              <a:buChar char="•"/>
-              <a:lnSpc>
-                <a:spcPts val="2200"/>
-              </a:lnSpc>
-            </a:pPr>
-            <a:r>
-              <a:rPr sz="2000" b="0">
-                <a:solidFill>
-                  <a:srgbClr val="333333"/>
-                </a:solidFill>
-                <a:latin typeface="Calibri"/>
-              </a:rPr>
-              <a:t>Export the best coordinates and deadspace</a:t>
-            </a:r>
-          </a:p>
-        </p:txBody>
-      </p:sp>
-      <p:sp>
-        <p:nvSpPr>
-          <p:cNvPr id="4" name="TextBox 3"/>
+              <a:t>Neighbors swap module positions</a:t>
+            </a:r>
+          </a:p>
+        </p:txBody>
+      </p:sp>
+      <p:sp>
+        <p:nvSpPr>
+          <p:cNvPr id="5" name="TextBox 4"/>
           <p:cNvSpPr txBox="1"/>
           <p:nvPr/>
         </p:nvSpPr>
@@ -4755,21 +4951,45 @@
                 </a:solidFill>
                 <a:latin typeface="Calibri"/>
               </a:rPr>
-              <a:t>Pitfalls</a:t>
-            </a:r>
-          </a:p>
-        </p:txBody>
-      </p:sp>
-      <p:sp>
-        <p:nvSpPr>
-          <p:cNvPr id="3" name="TextBox 2"/>
+              <a:t>Improve: bad → golden</a:t>
+            </a:r>
+          </a:p>
+        </p:txBody>
+      </p:sp>
+      <p:pic>
+        <p:nvPicPr>
+          <p:cNvPr id="3" name="Picture 2" descr="04-improve.png"/>
+          <p:cNvPicPr>
+            <a:picLocks noChangeAspect="1"/>
+          </p:cNvPicPr>
+          <p:nvPr/>
+        </p:nvPicPr>
+        <p:blipFill>
+          <a:blip r:embed="rId2"/>
+          <a:stretch>
+            <a:fillRect/>
+          </a:stretch>
+        </p:blipFill>
+        <p:spPr>
+          <a:xfrm>
+            <a:off x="548640" y="1143000"/>
+            <a:ext cx="9424736" cy="4572000"/>
+          </a:xfrm>
+          <a:prstGeom prst="rect">
+            <a:avLst/>
+          </a:prstGeom>
+        </p:spPr>
+      </p:pic>
+      <p:sp>
+        <p:nvSpPr>
+          <p:cNvPr id="4" name="TextBox 3"/>
           <p:cNvSpPr txBox="1"/>
           <p:nvPr/>
         </p:nvSpPr>
         <p:spPr>
           <a:xfrm>
-            <a:off x="548640" y="1234440"/>
-            <a:ext cx="11064240" cy="4937760"/>
+            <a:off x="548640" y="5897880"/>
+            <a:ext cx="11064240" cy="411480"/>
           </a:xfrm>
           <a:prstGeom prst="rect">
             <a:avLst/>
@@ -4782,98 +5002,26 @@
           </a:bodyPr>
           <a:lstStyle/>
           <a:p>
-            <a:pPr lvl="0" marL="457200" indent="-228600">
-              <a:buFont typeface="Calibri"/>
-              <a:spcAft>
-                <a:spcPts val="1000"/>
-              </a:spcAft>
-              <a:buSzPct val="100000"/>
-              <a:buChar char="•"/>
+            <a:pPr>
               <a:lnSpc>
                 <a:spcPts val="2200"/>
               </a:lnSpc>
             </a:pPr>
             <a:r>
-              <a:rPr sz="2000" b="0">
+              <a:rPr sz="1200" b="0">
                 <a:solidFill>
                   <a:srgbClr val="333333"/>
                 </a:solidFill>
                 <a:latin typeface="Calibri"/>
               </a:rPr>
-              <a:t>Moves that don’t change the packing waste iterations</a:t>
-            </a:r>
-          </a:p>
-          <a:p>
-            <a:pPr lvl="0" marL="457200" indent="-228600">
-              <a:buFont typeface="Calibri"/>
-              <a:spcAft>
-                <a:spcPts val="1000"/>
-              </a:spcAft>
-              <a:buSzPct val="100000"/>
-              <a:buChar char="•"/>
-              <a:lnSpc>
-                <a:spcPts val="2200"/>
-              </a:lnSpc>
-            </a:pPr>
-            <a:r>
-              <a:rPr sz="2000" b="0">
-                <a:solidFill>
-                  <a:srgbClr val="333333"/>
-                </a:solidFill>
-                <a:latin typeface="Calibri"/>
-              </a:rPr>
-              <a:t>A cost that ignores overflow will “optimize” illegal layouts</a:t>
-            </a:r>
-          </a:p>
-          <a:p>
-            <a:pPr lvl="0" marL="457200" indent="-228600">
-              <a:buFont typeface="Calibri"/>
-              <a:spcAft>
-                <a:spcPts val="1000"/>
-              </a:spcAft>
-              <a:buSzPct val="100000"/>
-              <a:buChar char="•"/>
-              <a:lnSpc>
-                <a:spcPts val="2200"/>
-              </a:lnSpc>
-            </a:pPr>
-            <a:r>
-              <a:rPr sz="2000" b="0">
-                <a:solidFill>
-                  <a:srgbClr val="333333"/>
-                </a:solidFill>
-                <a:latin typeface="Calibri"/>
-              </a:rPr>
-              <a:t>Cooling too fast freezes a bad packing</a:t>
-            </a:r>
-          </a:p>
-          <a:p>
-            <a:pPr lvl="0" marL="457200" indent="-228600">
-              <a:buFont typeface="Calibri"/>
-              <a:spcAft>
-                <a:spcPts val="1000"/>
-              </a:spcAft>
-              <a:buSzPct val="100000"/>
-              <a:buChar char="•"/>
-              <a:lnSpc>
-                <a:spcPts val="2200"/>
-              </a:lnSpc>
-            </a:pPr>
-            <a:r>
-              <a:rPr sz="2000" b="0">
-                <a:solidFill>
-                  <a:srgbClr val="333333"/>
-                </a:solidFill>
-                <a:latin typeface="Calibri"/>
-              </a:rPr>
-              <a:t>Also don’t compare costs across different outline penalties without documenting the</a:t>
-            </a:r>
-          </a:p>
-        </p:txBody>
-      </p:sp>
-      <p:sp>
-        <p:nvSpPr>
-          <p:cNvPr id="4" name="TextBox 3"/>
+              <a:t>Improve: bad → golden</a:t>
+            </a:r>
+          </a:p>
+        </p:txBody>
+      </p:sp>
+      <p:sp>
+        <p:nvSpPr>
+          <p:cNvPr id="5" name="TextBox 4"/>
           <p:cNvSpPr txBox="1"/>
           <p:nvPr/>
         </p:nvSpPr>
@@ -4962,7 +5110,166 @@
                 </a:solidFill>
                 <a:latin typeface="Calibri"/>
               </a:rPr>
-              <a:t>Your turn</a:t>
+              <a:t>SA needs a representation</a:t>
+            </a:r>
+          </a:p>
+        </p:txBody>
+      </p:sp>
+      <p:pic>
+        <p:nvPicPr>
+          <p:cNvPr id="3" name="Picture 2" descr="05-takeaway.png"/>
+          <p:cNvPicPr>
+            <a:picLocks noChangeAspect="1"/>
+          </p:cNvPicPr>
+          <p:nvPr/>
+        </p:nvPicPr>
+        <p:blipFill>
+          <a:blip r:embed="rId2"/>
+          <a:stretch>
+            <a:fillRect/>
+          </a:stretch>
+        </p:blipFill>
+        <p:spPr>
+          <a:xfrm>
+            <a:off x="548640" y="1143000"/>
+            <a:ext cx="9424736" cy="4572000"/>
+          </a:xfrm>
+          <a:prstGeom prst="rect">
+            <a:avLst/>
+          </a:prstGeom>
+        </p:spPr>
+      </p:pic>
+      <p:sp>
+        <p:nvSpPr>
+          <p:cNvPr id="4" name="TextBox 3"/>
+          <p:cNvSpPr txBox="1"/>
+          <p:nvPr/>
+        </p:nvSpPr>
+        <p:spPr>
+          <a:xfrm>
+            <a:off x="548640" y="5897880"/>
+            <a:ext cx="11064240" cy="411480"/>
+          </a:xfrm>
+          <a:prstGeom prst="rect">
+            <a:avLst/>
+          </a:prstGeom>
+          <a:noFill/>
+        </p:spPr>
+        <p:txBody>
+          <a:bodyPr wrap="square">
+            <a:noAutofit/>
+          </a:bodyPr>
+          <a:lstStyle/>
+          <a:p>
+            <a:pPr>
+              <a:lnSpc>
+                <a:spcPts val="2200"/>
+              </a:lnSpc>
+            </a:pPr>
+            <a:r>
+              <a:rPr sz="1200" b="0">
+                <a:solidFill>
+                  <a:srgbClr val="333333"/>
+                </a:solidFill>
+                <a:latin typeface="Calibri"/>
+              </a:rPr>
+              <a:t>SA needs a representation</a:t>
+            </a:r>
+          </a:p>
+        </p:txBody>
+      </p:sp>
+      <p:sp>
+        <p:nvSpPr>
+          <p:cNvPr id="5" name="TextBox 4"/>
+          <p:cNvSpPr txBox="1"/>
+          <p:nvPr/>
+        </p:nvSpPr>
+        <p:spPr>
+          <a:xfrm>
+            <a:off x="548640" y="6355080"/>
+            <a:ext cx="11064240" cy="320040"/>
+          </a:xfrm>
+          <a:prstGeom prst="rect">
+            <a:avLst/>
+          </a:prstGeom>
+          <a:noFill/>
+        </p:spPr>
+        <p:txBody>
+          <a:bodyPr wrap="square">
+            <a:noAutofit/>
+          </a:bodyPr>
+          <a:lstStyle/>
+          <a:p>
+            <a:pPr algn="r">
+              <a:lnSpc>
+                <a:spcPts val="2200"/>
+              </a:lnSpc>
+              <a:defRPr sz="1000" b="0">
+                <a:solidFill>
+                  <a:srgbClr val="666666"/>
+                </a:solidFill>
+                <a:latin typeface="Calibri"/>
+              </a:defRPr>
+            </a:pPr>
+            <a:r>
+              <a:t>learn_floorplanning — 01 simulated annealing fp</a:t>
+            </a:r>
+          </a:p>
+        </p:txBody>
+      </p:sp>
+    </p:spTree>
+  </p:cSld>
+  <p:clrMapOvr>
+    <a:masterClrMapping/>
+  </p:clrMapOvr>
+</p:sld>
+</file>
+
+<file path=ppt/slides/slide7.xml><?xml version="1.0" encoding="utf-8"?>
+<p:sld xmlns:a="http://schemas.openxmlformats.org/drawingml/2006/main" xmlns:p="http://schemas.openxmlformats.org/presentationml/2006/main" xmlns:r="http://schemas.openxmlformats.org/officeDocument/2006/relationships">
+  <p:cSld>
+    <p:spTree>
+      <p:nvGrpSpPr>
+        <p:cNvPr id="1" name=""/>
+        <p:cNvGrpSpPr/>
+        <p:nvPr/>
+      </p:nvGrpSpPr>
+      <p:grpSpPr/>
+      <p:sp>
+        <p:nvSpPr>
+          <p:cNvPr id="2" name="TextBox 1"/>
+          <p:cNvSpPr txBox="1"/>
+          <p:nvPr/>
+        </p:nvSpPr>
+        <p:spPr>
+          <a:xfrm>
+            <a:off x="548640" y="411480"/>
+            <a:ext cx="11064240" cy="777240"/>
+          </a:xfrm>
+          <a:prstGeom prst="rect">
+            <a:avLst/>
+          </a:prstGeom>
+          <a:noFill/>
+        </p:spPr>
+        <p:txBody>
+          <a:bodyPr wrap="square">
+            <a:noAutofit/>
+          </a:bodyPr>
+          <a:lstStyle/>
+          <a:p>
+            <a:pPr>
+              <a:lnSpc>
+                <a:spcPts val="2200"/>
+              </a:lnSpc>
+            </a:pPr>
+            <a:r>
+              <a:rPr sz="2800" b="1">
+                <a:solidFill>
+                  <a:srgbClr val="1A1A2E"/>
+                </a:solidFill>
+                <a:latin typeface="Calibri"/>
+              </a:rPr>
+              <a:t>Browser lab track</a:t>
             </a:r>
           </a:p>
         </p:txBody>
@@ -5007,7 +5314,7 @@
                 </a:solidFill>
                 <a:latin typeface="Calibri"/>
               </a:rPr>
-              <a:t>Get SA to improve deadspace or wirelength proxy from a random start while staying legal</a:t>
+              <a:t>Open simulated-annealing-fp</a:t>
             </a:r>
           </a:p>
           <a:p>
@@ -5029,7 +5336,333 @@
                 </a:solidFill>
                 <a:latin typeface="Calibri"/>
               </a:rPr>
-              <a:t>Next: soft modules, resize aspect under area constraints</a:t>
+              <a:t>Show bad, note cost at least one thousand</a:t>
+            </a:r>
+          </a:p>
+          <a:p>
+            <a:pPr lvl="0" marL="457200" indent="-228600">
+              <a:buFont typeface="Calibri"/>
+              <a:spcAft>
+                <a:spcPts val="1000"/>
+              </a:spcAft>
+              <a:buSzPct val="100000"/>
+              <a:buChar char="•"/>
+              <a:lnSpc>
+                <a:spcPts val="2200"/>
+              </a:lnSpc>
+            </a:pPr>
+            <a:r>
+              <a:rPr sz="2000" b="0">
+                <a:solidFill>
+                  <a:srgbClr val="333333"/>
+                </a:solidFill>
+                <a:latin typeface="Calibri"/>
+              </a:rPr>
+              <a:t>Show golden or Improve, cost drops below one thousand and legality becomes true</a:t>
+            </a:r>
+          </a:p>
+        </p:txBody>
+      </p:sp>
+      <p:sp>
+        <p:nvSpPr>
+          <p:cNvPr id="4" name="TextBox 3"/>
+          <p:cNvSpPr txBox="1"/>
+          <p:nvPr/>
+        </p:nvSpPr>
+        <p:spPr>
+          <a:xfrm>
+            <a:off x="548640" y="6355080"/>
+            <a:ext cx="11064240" cy="320040"/>
+          </a:xfrm>
+          <a:prstGeom prst="rect">
+            <a:avLst/>
+          </a:prstGeom>
+          <a:noFill/>
+        </p:spPr>
+        <p:txBody>
+          <a:bodyPr wrap="square">
+            <a:noAutofit/>
+          </a:bodyPr>
+          <a:lstStyle/>
+          <a:p>
+            <a:pPr algn="r">
+              <a:lnSpc>
+                <a:spcPts val="2200"/>
+              </a:lnSpc>
+              <a:defRPr sz="1000" b="0">
+                <a:solidFill>
+                  <a:srgbClr val="666666"/>
+                </a:solidFill>
+                <a:latin typeface="Calibri"/>
+              </a:defRPr>
+            </a:pPr>
+            <a:r>
+              <a:t>learn_floorplanning — 01 simulated annealing fp</a:t>
+            </a:r>
+          </a:p>
+        </p:txBody>
+      </p:sp>
+    </p:spTree>
+  </p:cSld>
+  <p:clrMapOvr>
+    <a:masterClrMapping/>
+  </p:clrMapOvr>
+</p:sld>
+</file>
+
+<file path=ppt/slides/slide8.xml><?xml version="1.0" encoding="utf-8"?>
+<p:sld xmlns:a="http://schemas.openxmlformats.org/drawingml/2006/main" xmlns:p="http://schemas.openxmlformats.org/presentationml/2006/main" xmlns:r="http://schemas.openxmlformats.org/officeDocument/2006/relationships">
+  <p:cSld>
+    <p:spTree>
+      <p:nvGrpSpPr>
+        <p:cNvPr id="1" name=""/>
+        <p:cNvGrpSpPr/>
+        <p:nvPr/>
+      </p:nvGrpSpPr>
+      <p:grpSpPr/>
+      <p:sp>
+        <p:nvSpPr>
+          <p:cNvPr id="2" name="TextBox 1"/>
+          <p:cNvSpPr txBox="1"/>
+          <p:nvPr/>
+        </p:nvSpPr>
+        <p:spPr>
+          <a:xfrm>
+            <a:off x="548640" y="411480"/>
+            <a:ext cx="11064240" cy="777240"/>
+          </a:xfrm>
+          <a:prstGeom prst="rect">
+            <a:avLst/>
+          </a:prstGeom>
+          <a:noFill/>
+        </p:spPr>
+        <p:txBody>
+          <a:bodyPr wrap="square">
+            <a:noAutofit/>
+          </a:bodyPr>
+          <a:lstStyle/>
+          <a:p>
+            <a:pPr>
+              <a:lnSpc>
+                <a:spcPts val="2200"/>
+              </a:lnSpc>
+            </a:pPr>
+            <a:r>
+              <a:rPr sz="2800" b="1">
+                <a:solidFill>
+                  <a:srgbClr val="1A1A2E"/>
+                </a:solidFill>
+                <a:latin typeface="Calibri"/>
+              </a:rPr>
+              <a:t>Implement track</a:t>
+            </a:r>
+          </a:p>
+        </p:txBody>
+      </p:sp>
+      <p:sp>
+        <p:nvSpPr>
+          <p:cNvPr id="3" name="TextBox 2"/>
+          <p:cNvSpPr txBox="1"/>
+          <p:nvPr/>
+        </p:nvSpPr>
+        <p:spPr>
+          <a:xfrm>
+            <a:off x="548640" y="1234440"/>
+            <a:ext cx="11064240" cy="4937760"/>
+          </a:xfrm>
+          <a:prstGeom prst="rect">
+            <a:avLst/>
+          </a:prstGeom>
+          <a:noFill/>
+        </p:spPr>
+        <p:txBody>
+          <a:bodyPr wrap="square">
+            <a:noAutofit/>
+          </a:bodyPr>
+          <a:lstStyle/>
+          <a:p>
+            <a:pPr lvl="0" marL="457200" indent="-228600">
+              <a:buFont typeface="Calibri"/>
+              <a:spcAft>
+                <a:spcPts val="1000"/>
+              </a:spcAft>
+              <a:buSzPct val="100000"/>
+              <a:buChar char="•"/>
+              <a:lnSpc>
+                <a:spcPts val="2200"/>
+              </a:lnSpc>
+            </a:pPr>
+            <a:r>
+              <a:rPr sz="2000" b="0">
+                <a:solidFill>
+                  <a:srgbClr val="333333"/>
+                </a:solidFill>
+                <a:latin typeface="Calibri"/>
+              </a:rPr>
+              <a:t>Implement cost with an illegality penalty, plus deadspace and HPWL terms</a:t>
+            </a:r>
+          </a:p>
+          <a:p>
+            <a:pPr lvl="0" marL="457200" indent="-228600">
+              <a:buFont typeface="Calibri"/>
+              <a:spcAft>
+                <a:spcPts val="1000"/>
+              </a:spcAft>
+              <a:buSzPct val="100000"/>
+              <a:buChar char="•"/>
+              <a:lnSpc>
+                <a:spcPts val="2200"/>
+              </a:lnSpc>
+            </a:pPr>
+            <a:r>
+              <a:rPr sz="2000" b="0">
+                <a:solidFill>
+                  <a:srgbClr val="333333"/>
+                </a:solidFill>
+                <a:latin typeface="Calibri"/>
+              </a:rPr>
+              <a:t>Assert cost(golden) is less than cost(bad), and saSwap only exchanges coordinates</a:t>
+            </a:r>
+          </a:p>
+        </p:txBody>
+      </p:sp>
+      <p:sp>
+        <p:nvSpPr>
+          <p:cNvPr id="4" name="TextBox 3"/>
+          <p:cNvSpPr txBox="1"/>
+          <p:nvPr/>
+        </p:nvSpPr>
+        <p:spPr>
+          <a:xfrm>
+            <a:off x="548640" y="6355080"/>
+            <a:ext cx="11064240" cy="320040"/>
+          </a:xfrm>
+          <a:prstGeom prst="rect">
+            <a:avLst/>
+          </a:prstGeom>
+          <a:noFill/>
+        </p:spPr>
+        <p:txBody>
+          <a:bodyPr wrap="square">
+            <a:noAutofit/>
+          </a:bodyPr>
+          <a:lstStyle/>
+          <a:p>
+            <a:pPr algn="r">
+              <a:lnSpc>
+                <a:spcPts val="2200"/>
+              </a:lnSpc>
+              <a:defRPr sz="1000" b="0">
+                <a:solidFill>
+                  <a:srgbClr val="666666"/>
+                </a:solidFill>
+                <a:latin typeface="Calibri"/>
+              </a:defRPr>
+            </a:pPr>
+            <a:r>
+              <a:t>learn_floorplanning — 01 simulated annealing fp</a:t>
+            </a:r>
+          </a:p>
+        </p:txBody>
+      </p:sp>
+    </p:spTree>
+  </p:cSld>
+  <p:clrMapOvr>
+    <a:masterClrMapping/>
+  </p:clrMapOvr>
+</p:sld>
+</file>
+
+<file path=ppt/slides/slide9.xml><?xml version="1.0" encoding="utf-8"?>
+<p:sld xmlns:a="http://schemas.openxmlformats.org/drawingml/2006/main" xmlns:p="http://schemas.openxmlformats.org/presentationml/2006/main" xmlns:r="http://schemas.openxmlformats.org/officeDocument/2006/relationships">
+  <p:cSld>
+    <p:spTree>
+      <p:nvGrpSpPr>
+        <p:cNvPr id="1" name=""/>
+        <p:cNvGrpSpPr/>
+        <p:nvPr/>
+      </p:nvGrpSpPr>
+      <p:grpSpPr/>
+      <p:sp>
+        <p:nvSpPr>
+          <p:cNvPr id="2" name="TextBox 1"/>
+          <p:cNvSpPr txBox="1"/>
+          <p:nvPr/>
+        </p:nvSpPr>
+        <p:spPr>
+          <a:xfrm>
+            <a:off x="548640" y="411480"/>
+            <a:ext cx="11064240" cy="777240"/>
+          </a:xfrm>
+          <a:prstGeom prst="rect">
+            <a:avLst/>
+          </a:prstGeom>
+          <a:noFill/>
+        </p:spPr>
+        <p:txBody>
+          <a:bodyPr wrap="square">
+            <a:noAutofit/>
+          </a:bodyPr>
+          <a:lstStyle/>
+          <a:p>
+            <a:pPr>
+              <a:lnSpc>
+                <a:spcPts val="2200"/>
+              </a:lnSpc>
+            </a:pPr>
+            <a:r>
+              <a:rPr sz="2800" b="1">
+                <a:solidFill>
+                  <a:srgbClr val="1A1A2E"/>
+                </a:solidFill>
+                <a:latin typeface="Calibri"/>
+              </a:rPr>
+              <a:t>Pitfalls</a:t>
+            </a:r>
+          </a:p>
+        </p:txBody>
+      </p:sp>
+      <p:sp>
+        <p:nvSpPr>
+          <p:cNvPr id="3" name="TextBox 2"/>
+          <p:cNvSpPr txBox="1"/>
+          <p:nvPr/>
+        </p:nvSpPr>
+        <p:spPr>
+          <a:xfrm>
+            <a:off x="548640" y="1234440"/>
+            <a:ext cx="11064240" cy="4937760"/>
+          </a:xfrm>
+          <a:prstGeom prst="rect">
+            <a:avLst/>
+          </a:prstGeom>
+          <a:noFill/>
+        </p:spPr>
+        <p:txBody>
+          <a:bodyPr wrap="square">
+            <a:noAutofit/>
+          </a:bodyPr>
+          <a:lstStyle/>
+          <a:p>
+            <a:pPr lvl="0" marL="457200" indent="-228600">
+              <a:buFont typeface="Calibri"/>
+              <a:spcAft>
+                <a:spcPts val="1000"/>
+              </a:spcAft>
+              <a:buSzPct val="100000"/>
+              <a:buChar char="•"/>
+              <a:lnSpc>
+                <a:spcPts val="2200"/>
+              </a:lnSpc>
+            </a:pPr>
+            <a:r>
+              <a:rPr sz="2000" b="0">
+                <a:solidFill>
+                  <a:srgbClr val="333333"/>
+                </a:solidFill>
+                <a:latin typeface="Calibri"/>
+              </a:rPr>
+              <a:t>Accepting illegal states without penalty</a:t>
             </a:r>
           </a:p>
         </p:txBody>

--- a/courses/learn_floorplanning/module03-01-simulated-annealing-fp/slides.pptx
+++ b/courses/learn_floorplanning/module03-01-simulated-annealing-fp/slides.pptx
@@ -15,6 +15,9 @@
     <p:sldId id="263" r:id="rId15"/>
     <p:sldId id="264" r:id="rId16"/>
     <p:sldId id="265" r:id="rId17"/>
+    <p:sldId id="266" r:id="rId18"/>
+    <p:sldId id="267" r:id="rId19"/>
+    <p:sldId id="268" r:id="rId20"/>
   </p:sldIdLst>
   <p:sldSz cx="12191695" cy="6858000" type="screen4x3"/>
   <p:notesSz cx="6858000" cy="9144000"/>
@@ -514,12 +517,6 @@
               <a:t>Toy cost adds one thousand when a packing is illegal. The bad overflow seed sits near one thousand forty-four; the golden legal packing scores about thirty-six. Annealing should move toward legal, lower cost.</a:t>
             </a:r>
           </a:p>
-          <a:p/>
-          <a:p>
-            <a:r>
-              <a:t>&lt;!-- algorithm-walkthrough --&gt;</a:t>
-            </a:r>
-          </a:p>
         </p:txBody>
       </p:sp>
       <p:sp>
@@ -587,6 +584,146 @@
           <a:lstStyle/>
           <a:p>
             <a:r>
+              <a:t>Implement cost with an illegality penalty, plus deadspace and HPWL terms. Assert cost(golden) is less than cost(bad), and saSwap only exchanges coordinates.</a:t>
+            </a:r>
+          </a:p>
+        </p:txBody>
+      </p:sp>
+      <p:sp>
+        <p:nvSpPr>
+          <p:cNvPr id="4" name="Slide Number Placeholder 3"/>
+          <p:cNvSpPr>
+            <a:spLocks noGrp="1"/>
+          </p:cNvSpPr>
+          <p:nvPr>
+            <p:ph type="sldNum" idx="5" sz="quarter"/>
+          </p:nvPr>
+        </p:nvSpPr>
+        <p:spPr/>
+      </p:sp>
+    </p:spTree>
+  </p:cSld>
+  <p:clrMapOvr>
+    <a:masterClrMapping/>
+  </p:clrMapOvr>
+</p:notes>
+</file>
+
+<file path=ppt/notesSlides/notesSlide11.xml><?xml version="1.0" encoding="utf-8"?>
+<p:notes xmlns:a="http://schemas.openxmlformats.org/drawingml/2006/main" xmlns:p="http://schemas.openxmlformats.org/presentationml/2006/main" xmlns:r="http://schemas.openxmlformats.org/officeDocument/2006/relationships">
+  <p:cSld>
+    <p:spTree>
+      <p:nvGrpSpPr>
+        <p:cNvPr id="1" name=""/>
+        <p:cNvGrpSpPr/>
+        <p:nvPr/>
+      </p:nvGrpSpPr>
+      <p:grpSpPr>
+        <a:xfrm>
+          <a:off x="0" y="0"/>
+          <a:ext cx="0" cy="0"/>
+          <a:chOff x="0" y="0"/>
+          <a:chExt cx="0" cy="0"/>
+        </a:xfrm>
+      </p:grpSpPr>
+      <p:sp>
+        <p:nvSpPr>
+          <p:cNvPr id="2" name="Slide Image Placeholder 1"/>
+          <p:cNvSpPr>
+            <a:spLocks noGrp="1"/>
+          </p:cNvSpPr>
+          <p:nvPr>
+            <p:ph type="sldImg" idx="2"/>
+          </p:nvPr>
+        </p:nvSpPr>
+        <p:spPr/>
+      </p:sp>
+      <p:sp>
+        <p:nvSpPr>
+          <p:cNvPr id="3" name="Notes Placeholder 2"/>
+          <p:cNvSpPr>
+            <a:spLocks noGrp="1"/>
+          </p:cNvSpPr>
+          <p:nvPr>
+            <p:ph type="body" idx="3" sz="quarter"/>
+          </p:nvPr>
+        </p:nvSpPr>
+        <p:spPr/>
+        <p:txBody>
+          <a:bodyPr/>
+          <a:lstStyle/>
+          <a:p>
+            <a:r>
+              <a:t>Accepting illegal states without penalty; forgetting to rescore after a swap; cooling so fast you never escape the bad seed.</a:t>
+            </a:r>
+          </a:p>
+        </p:txBody>
+      </p:sp>
+      <p:sp>
+        <p:nvSpPr>
+          <p:cNvPr id="4" name="Slide Number Placeholder 3"/>
+          <p:cNvSpPr>
+            <a:spLocks noGrp="1"/>
+          </p:cNvSpPr>
+          <p:nvPr>
+            <p:ph type="sldNum" idx="5" sz="quarter"/>
+          </p:nvPr>
+        </p:nvSpPr>
+        <p:spPr/>
+      </p:sp>
+    </p:spTree>
+  </p:cSld>
+  <p:clrMapOvr>
+    <a:masterClrMapping/>
+  </p:clrMapOvr>
+</p:notes>
+</file>
+
+<file path=ppt/notesSlides/notesSlide12.xml><?xml version="1.0" encoding="utf-8"?>
+<p:notes xmlns:a="http://schemas.openxmlformats.org/drawingml/2006/main" xmlns:p="http://schemas.openxmlformats.org/presentationml/2006/main" xmlns:r="http://schemas.openxmlformats.org/officeDocument/2006/relationships">
+  <p:cSld>
+    <p:spTree>
+      <p:nvGrpSpPr>
+        <p:cNvPr id="1" name=""/>
+        <p:cNvGrpSpPr/>
+        <p:nvPr/>
+      </p:nvGrpSpPr>
+      <p:grpSpPr>
+        <a:xfrm>
+          <a:off x="0" y="0"/>
+          <a:ext cx="0" cy="0"/>
+          <a:chOff x="0" y="0"/>
+          <a:chExt cx="0" cy="0"/>
+        </a:xfrm>
+      </p:grpSpPr>
+      <p:sp>
+        <p:nvSpPr>
+          <p:cNvPr id="2" name="Slide Image Placeholder 1"/>
+          <p:cNvSpPr>
+            <a:spLocks noGrp="1"/>
+          </p:cNvSpPr>
+          <p:nvPr>
+            <p:ph type="sldImg" idx="2"/>
+          </p:nvPr>
+        </p:nvSpPr>
+        <p:spPr/>
+      </p:sp>
+      <p:sp>
+        <p:nvSpPr>
+          <p:cNvPr id="3" name="Notes Placeholder 2"/>
+          <p:cNvSpPr>
+            <a:spLocks noGrp="1"/>
+          </p:cNvSpPr>
+          <p:nvPr>
+            <p:ph type="body" idx="3" sz="quarter"/>
+          </p:nvPr>
+        </p:nvSpPr>
+        <p:spPr/>
+        <p:txBody>
+          <a:bodyPr/>
+          <a:lstStyle/>
+          <a:p>
+            <a:r>
               <a:t>Demonstrate one improve step from bad to golden. Next: soft module A reshaped from three by two to two by three.</a:t>
             </a:r>
           </a:p>
@@ -657,7 +794,13 @@
           <a:lstStyle/>
           <a:p>
             <a:r>
-              <a:t>Our toy cost adds one thousand when the packing is illegal. The bad overflow seed therefore sits at cost about one thousand forty-four—dominated by the penalty.</a:t>
+              <a:t>Floorplan annealing uses a cost that heavily penalizes illegality. Pseudocode proposes neighbors, accepts by Metropolis, and keeps the best legal iterate.</a:t>
+            </a:r>
+          </a:p>
+          <a:p/>
+          <a:p>
+            <a:r>
+              <a:t>Open this module's examples file and find the Pseudocode section. That written sketch is what you implement on the implement track and what the browser challenges measure.</a:t>
             </a:r>
           </a:p>
         </p:txBody>
@@ -727,7 +870,7 @@
           <a:lstStyle/>
           <a:p>
             <a:r>
-              <a:t>The golden legal packing drops below the penalty floor. Cost is about thirty-six—deadspace and a small HPWL proxy, no illegality tax.</a:t>
+              <a:t>Bad overflow seed costs about one thousand forty-four. Golden legal packing is about thirty-six. One teaching improve step replaces bad with golden.</a:t>
             </a:r>
           </a:p>
         </p:txBody>
@@ -797,7 +940,7 @@
           <a:lstStyle/>
           <a:p>
             <a:r>
-              <a:t>A simple SA move swaps the lower-left corners of two modules while keeping sizes. Accept improving moves; accept worsening ones with temperature probability.</a:t>
+              <a:t>Our toy cost adds one thousand when the packing is illegal. The bad overflow seed therefore sits at cost about one thousand forty-four—dominated by the penalty.</a:t>
             </a:r>
           </a:p>
         </p:txBody>
@@ -867,7 +1010,7 @@
           <a:lstStyle/>
           <a:p>
             <a:r>
-              <a:t>One teaching “improve” step replaces the illegal seed with the golden packing. Cost falls below one thousand and legality flips to true—exactly what a cooling schedule should prefer.</a:t>
+              <a:t>The golden legal packing drops below the penalty floor. Cost is about thirty-six—deadspace and a small HPWL proxy, no illegality tax.</a:t>
             </a:r>
           </a:p>
         </p:txBody>
@@ -937,13 +1080,7 @@
           <a:lstStyle/>
           <a:p>
             <a:r>
-              <a:t>Annealing is only as good as the move set. Pair it with polish, B-star, or sequence-pair edits—plus soft sizing and macros—in the labs that follow.</a:t>
-            </a:r>
-          </a:p>
-          <a:p/>
-          <a:p>
-            <a:r>
-              <a:t>&lt;!-- /algorithm-walkthrough --&gt;</a:t>
+              <a:t>A simple SA move swaps the lower-left corners of two modules while keeping sizes. Accept improving moves; accept worsening ones with temperature probability.</a:t>
             </a:r>
           </a:p>
         </p:txBody>
@@ -1013,7 +1150,7 @@
           <a:lstStyle/>
           <a:p>
             <a:r>
-              <a:t>Open simulated-annealing-fp. Show bad, note cost at least one thousand. Show golden or Improve—cost drops below one thousand and legality becomes true.</a:t>
+              <a:t>One teaching “improve” step replaces the illegal seed with the golden packing. Cost falls below one thousand and legality flips to true—exactly what a cooling schedule should prefer.</a:t>
             </a:r>
           </a:p>
         </p:txBody>
@@ -1083,7 +1220,7 @@
           <a:lstStyle/>
           <a:p>
             <a:r>
-              <a:t>Implement cost with an illegality penalty, plus deadspace and HPWL terms. Assert cost(golden) is less than cost(bad), and saSwap only exchanges coordinates.</a:t>
+              <a:t>Annealing is only as good as the move set. Pair it with polish, B-star, or sequence-pair edits—plus soft sizing and macros—in the labs that follow.</a:t>
             </a:r>
           </a:p>
         </p:txBody>
@@ -1153,7 +1290,7 @@
           <a:lstStyle/>
           <a:p>
             <a:r>
-              <a:t>Accepting illegal states without penalty; forgetting to rescore after a swap; cooling so fast you never escape the bad seed.</a:t>
+              <a:t>Open simulated-annealing-fp. Show bad, note cost at least one thousand. Show golden or Improve—cost drops below one thousand and legality becomes true.</a:t>
             </a:r>
           </a:p>
         </p:txBody>
@@ -4311,7 +4448,7 @@
                 </a:solidFill>
                 <a:latin typeface="Calibri"/>
               </a:rPr>
-              <a:t>Your turn</a:t>
+              <a:t>Browser lab track</a:t>
             </a:r>
           </a:p>
         </p:txBody>
@@ -4356,7 +4493,7 @@
                 </a:solidFill>
                 <a:latin typeface="Calibri"/>
               </a:rPr>
-              <a:t>Demonstrate one improve step from bad to golden</a:t>
+              <a:t>Open simulated-annealing-fp</a:t>
             </a:r>
           </a:p>
           <a:p>
@@ -4378,7 +4515,29 @@
                 </a:solidFill>
                 <a:latin typeface="Calibri"/>
               </a:rPr>
-              <a:t>Next: soft module A reshaped from three by two to two by three</a:t>
+              <a:t>Show bad, note cost at least one thousand</a:t>
+            </a:r>
+          </a:p>
+          <a:p>
+            <a:pPr lvl="0" marL="457200" indent="-228600">
+              <a:buFont typeface="Calibri"/>
+              <a:spcAft>
+                <a:spcPts val="1000"/>
+              </a:spcAft>
+              <a:buSzPct val="100000"/>
+              <a:buChar char="•"/>
+              <a:lnSpc>
+                <a:spcPts val="2200"/>
+              </a:lnSpc>
+            </a:pPr>
+            <a:r>
+              <a:rPr sz="2000" b="0">
+                <a:solidFill>
+                  <a:srgbClr val="333333"/>
+                </a:solidFill>
+                <a:latin typeface="Calibri"/>
+              </a:rPr>
+              <a:t>Show golden or Improve, cost drops below one thousand and legality becomes true</a:t>
             </a:r>
           </a:p>
         </p:txBody>
@@ -4430,7 +4589,1120 @@
 </p:sld>
 </file>
 
+<file path=ppt/slides/slide11.xml><?xml version="1.0" encoding="utf-8"?>
+<p:sld xmlns:a="http://schemas.openxmlformats.org/drawingml/2006/main" xmlns:p="http://schemas.openxmlformats.org/presentationml/2006/main" xmlns:r="http://schemas.openxmlformats.org/officeDocument/2006/relationships">
+  <p:cSld>
+    <p:spTree>
+      <p:nvGrpSpPr>
+        <p:cNvPr id="1" name=""/>
+        <p:cNvGrpSpPr/>
+        <p:nvPr/>
+      </p:nvGrpSpPr>
+      <p:grpSpPr/>
+      <p:sp>
+        <p:nvSpPr>
+          <p:cNvPr id="2" name="TextBox 1"/>
+          <p:cNvSpPr txBox="1"/>
+          <p:nvPr/>
+        </p:nvSpPr>
+        <p:spPr>
+          <a:xfrm>
+            <a:off x="548640" y="411480"/>
+            <a:ext cx="11064240" cy="777240"/>
+          </a:xfrm>
+          <a:prstGeom prst="rect">
+            <a:avLst/>
+          </a:prstGeom>
+          <a:noFill/>
+        </p:spPr>
+        <p:txBody>
+          <a:bodyPr wrap="square">
+            <a:noAutofit/>
+          </a:bodyPr>
+          <a:lstStyle/>
+          <a:p>
+            <a:pPr>
+              <a:lnSpc>
+                <a:spcPts val="2200"/>
+              </a:lnSpc>
+            </a:pPr>
+            <a:r>
+              <a:rPr sz="2800" b="1">
+                <a:solidFill>
+                  <a:srgbClr val="1A1A2E"/>
+                </a:solidFill>
+                <a:latin typeface="Calibri"/>
+              </a:rPr>
+              <a:t>Implement track</a:t>
+            </a:r>
+          </a:p>
+        </p:txBody>
+      </p:sp>
+      <p:sp>
+        <p:nvSpPr>
+          <p:cNvPr id="3" name="TextBox 2"/>
+          <p:cNvSpPr txBox="1"/>
+          <p:nvPr/>
+        </p:nvSpPr>
+        <p:spPr>
+          <a:xfrm>
+            <a:off x="548640" y="1234440"/>
+            <a:ext cx="11064240" cy="4937760"/>
+          </a:xfrm>
+          <a:prstGeom prst="rect">
+            <a:avLst/>
+          </a:prstGeom>
+          <a:noFill/>
+        </p:spPr>
+        <p:txBody>
+          <a:bodyPr wrap="square">
+            <a:noAutofit/>
+          </a:bodyPr>
+          <a:lstStyle/>
+          <a:p>
+            <a:pPr lvl="0" marL="457200" indent="-228600">
+              <a:buFont typeface="Calibri"/>
+              <a:spcAft>
+                <a:spcPts val="1000"/>
+              </a:spcAft>
+              <a:buSzPct val="100000"/>
+              <a:buChar char="•"/>
+              <a:lnSpc>
+                <a:spcPts val="2200"/>
+              </a:lnSpc>
+            </a:pPr>
+            <a:r>
+              <a:rPr sz="2000" b="0">
+                <a:solidFill>
+                  <a:srgbClr val="333333"/>
+                </a:solidFill>
+                <a:latin typeface="Calibri"/>
+              </a:rPr>
+              <a:t>Implement cost with an illegality penalty, plus deadspace and HPWL terms</a:t>
+            </a:r>
+          </a:p>
+          <a:p>
+            <a:pPr lvl="0" marL="457200" indent="-228600">
+              <a:buFont typeface="Calibri"/>
+              <a:spcAft>
+                <a:spcPts val="1000"/>
+              </a:spcAft>
+              <a:buSzPct val="100000"/>
+              <a:buChar char="•"/>
+              <a:lnSpc>
+                <a:spcPts val="2200"/>
+              </a:lnSpc>
+            </a:pPr>
+            <a:r>
+              <a:rPr sz="2000" b="0">
+                <a:solidFill>
+                  <a:srgbClr val="333333"/>
+                </a:solidFill>
+                <a:latin typeface="Calibri"/>
+              </a:rPr>
+              <a:t>Assert cost(golden) is less than cost(bad), and saSwap only exchanges coordinates</a:t>
+            </a:r>
+          </a:p>
+        </p:txBody>
+      </p:sp>
+      <p:sp>
+        <p:nvSpPr>
+          <p:cNvPr id="4" name="TextBox 3"/>
+          <p:cNvSpPr txBox="1"/>
+          <p:nvPr/>
+        </p:nvSpPr>
+        <p:spPr>
+          <a:xfrm>
+            <a:off x="548640" y="6355080"/>
+            <a:ext cx="11064240" cy="320040"/>
+          </a:xfrm>
+          <a:prstGeom prst="rect">
+            <a:avLst/>
+          </a:prstGeom>
+          <a:noFill/>
+        </p:spPr>
+        <p:txBody>
+          <a:bodyPr wrap="square">
+            <a:noAutofit/>
+          </a:bodyPr>
+          <a:lstStyle/>
+          <a:p>
+            <a:pPr algn="r">
+              <a:lnSpc>
+                <a:spcPts val="2200"/>
+              </a:lnSpc>
+              <a:defRPr sz="1000" b="0">
+                <a:solidFill>
+                  <a:srgbClr val="666666"/>
+                </a:solidFill>
+                <a:latin typeface="Calibri"/>
+              </a:defRPr>
+            </a:pPr>
+            <a:r>
+              <a:t>learn_floorplanning — 01 simulated annealing fp</a:t>
+            </a:r>
+          </a:p>
+        </p:txBody>
+      </p:sp>
+    </p:spTree>
+  </p:cSld>
+  <p:clrMapOvr>
+    <a:masterClrMapping/>
+  </p:clrMapOvr>
+</p:sld>
+</file>
+
+<file path=ppt/slides/slide12.xml><?xml version="1.0" encoding="utf-8"?>
+<p:sld xmlns:a="http://schemas.openxmlformats.org/drawingml/2006/main" xmlns:p="http://schemas.openxmlformats.org/presentationml/2006/main" xmlns:r="http://schemas.openxmlformats.org/officeDocument/2006/relationships">
+  <p:cSld>
+    <p:spTree>
+      <p:nvGrpSpPr>
+        <p:cNvPr id="1" name=""/>
+        <p:cNvGrpSpPr/>
+        <p:nvPr/>
+      </p:nvGrpSpPr>
+      <p:grpSpPr/>
+      <p:sp>
+        <p:nvSpPr>
+          <p:cNvPr id="2" name="TextBox 1"/>
+          <p:cNvSpPr txBox="1"/>
+          <p:nvPr/>
+        </p:nvSpPr>
+        <p:spPr>
+          <a:xfrm>
+            <a:off x="548640" y="411480"/>
+            <a:ext cx="11064240" cy="777240"/>
+          </a:xfrm>
+          <a:prstGeom prst="rect">
+            <a:avLst/>
+          </a:prstGeom>
+          <a:noFill/>
+        </p:spPr>
+        <p:txBody>
+          <a:bodyPr wrap="square">
+            <a:noAutofit/>
+          </a:bodyPr>
+          <a:lstStyle/>
+          <a:p>
+            <a:pPr>
+              <a:lnSpc>
+                <a:spcPts val="2200"/>
+              </a:lnSpc>
+            </a:pPr>
+            <a:r>
+              <a:rPr sz="2800" b="1">
+                <a:solidFill>
+                  <a:srgbClr val="1A1A2E"/>
+                </a:solidFill>
+                <a:latin typeface="Calibri"/>
+              </a:rPr>
+              <a:t>Pitfalls</a:t>
+            </a:r>
+          </a:p>
+        </p:txBody>
+      </p:sp>
+      <p:sp>
+        <p:nvSpPr>
+          <p:cNvPr id="3" name="TextBox 2"/>
+          <p:cNvSpPr txBox="1"/>
+          <p:nvPr/>
+        </p:nvSpPr>
+        <p:spPr>
+          <a:xfrm>
+            <a:off x="548640" y="1234440"/>
+            <a:ext cx="11064240" cy="4937760"/>
+          </a:xfrm>
+          <a:prstGeom prst="rect">
+            <a:avLst/>
+          </a:prstGeom>
+          <a:noFill/>
+        </p:spPr>
+        <p:txBody>
+          <a:bodyPr wrap="square">
+            <a:noAutofit/>
+          </a:bodyPr>
+          <a:lstStyle/>
+          <a:p>
+            <a:pPr lvl="0" marL="457200" indent="-228600">
+              <a:buFont typeface="Calibri"/>
+              <a:spcAft>
+                <a:spcPts val="1000"/>
+              </a:spcAft>
+              <a:buSzPct val="100000"/>
+              <a:buChar char="•"/>
+              <a:lnSpc>
+                <a:spcPts val="2200"/>
+              </a:lnSpc>
+            </a:pPr>
+            <a:r>
+              <a:rPr sz="2000" b="0">
+                <a:solidFill>
+                  <a:srgbClr val="333333"/>
+                </a:solidFill>
+                <a:latin typeface="Calibri"/>
+              </a:rPr>
+              <a:t>Accepting illegal states without penalty</a:t>
+            </a:r>
+          </a:p>
+        </p:txBody>
+      </p:sp>
+      <p:sp>
+        <p:nvSpPr>
+          <p:cNvPr id="4" name="TextBox 3"/>
+          <p:cNvSpPr txBox="1"/>
+          <p:nvPr/>
+        </p:nvSpPr>
+        <p:spPr>
+          <a:xfrm>
+            <a:off x="548640" y="6355080"/>
+            <a:ext cx="11064240" cy="320040"/>
+          </a:xfrm>
+          <a:prstGeom prst="rect">
+            <a:avLst/>
+          </a:prstGeom>
+          <a:noFill/>
+        </p:spPr>
+        <p:txBody>
+          <a:bodyPr wrap="square">
+            <a:noAutofit/>
+          </a:bodyPr>
+          <a:lstStyle/>
+          <a:p>
+            <a:pPr algn="r">
+              <a:lnSpc>
+                <a:spcPts val="2200"/>
+              </a:lnSpc>
+              <a:defRPr sz="1000" b="0">
+                <a:solidFill>
+                  <a:srgbClr val="666666"/>
+                </a:solidFill>
+                <a:latin typeface="Calibri"/>
+              </a:defRPr>
+            </a:pPr>
+            <a:r>
+              <a:t>learn_floorplanning — 01 simulated annealing fp</a:t>
+            </a:r>
+          </a:p>
+        </p:txBody>
+      </p:sp>
+    </p:spTree>
+  </p:cSld>
+  <p:clrMapOvr>
+    <a:masterClrMapping/>
+  </p:clrMapOvr>
+</p:sld>
+</file>
+
+<file path=ppt/slides/slide13.xml><?xml version="1.0" encoding="utf-8"?>
+<p:sld xmlns:a="http://schemas.openxmlformats.org/drawingml/2006/main" xmlns:p="http://schemas.openxmlformats.org/presentationml/2006/main" xmlns:r="http://schemas.openxmlformats.org/officeDocument/2006/relationships">
+  <p:cSld>
+    <p:spTree>
+      <p:nvGrpSpPr>
+        <p:cNvPr id="1" name=""/>
+        <p:cNvGrpSpPr/>
+        <p:nvPr/>
+      </p:nvGrpSpPr>
+      <p:grpSpPr/>
+      <p:sp>
+        <p:nvSpPr>
+          <p:cNvPr id="2" name="TextBox 1"/>
+          <p:cNvSpPr txBox="1"/>
+          <p:nvPr/>
+        </p:nvSpPr>
+        <p:spPr>
+          <a:xfrm>
+            <a:off x="548640" y="411480"/>
+            <a:ext cx="11064240" cy="777240"/>
+          </a:xfrm>
+          <a:prstGeom prst="rect">
+            <a:avLst/>
+          </a:prstGeom>
+          <a:noFill/>
+        </p:spPr>
+        <p:txBody>
+          <a:bodyPr wrap="square">
+            <a:noAutofit/>
+          </a:bodyPr>
+          <a:lstStyle/>
+          <a:p>
+            <a:pPr>
+              <a:lnSpc>
+                <a:spcPts val="2200"/>
+              </a:lnSpc>
+            </a:pPr>
+            <a:r>
+              <a:rPr sz="2800" b="1">
+                <a:solidFill>
+                  <a:srgbClr val="1A1A2E"/>
+                </a:solidFill>
+                <a:latin typeface="Calibri"/>
+              </a:rPr>
+              <a:t>Your turn</a:t>
+            </a:r>
+          </a:p>
+        </p:txBody>
+      </p:sp>
+      <p:sp>
+        <p:nvSpPr>
+          <p:cNvPr id="3" name="TextBox 2"/>
+          <p:cNvSpPr txBox="1"/>
+          <p:nvPr/>
+        </p:nvSpPr>
+        <p:spPr>
+          <a:xfrm>
+            <a:off x="548640" y="1234440"/>
+            <a:ext cx="11064240" cy="4937760"/>
+          </a:xfrm>
+          <a:prstGeom prst="rect">
+            <a:avLst/>
+          </a:prstGeom>
+          <a:noFill/>
+        </p:spPr>
+        <p:txBody>
+          <a:bodyPr wrap="square">
+            <a:noAutofit/>
+          </a:bodyPr>
+          <a:lstStyle/>
+          <a:p>
+            <a:pPr lvl="0" marL="457200" indent="-228600">
+              <a:buFont typeface="Calibri"/>
+              <a:spcAft>
+                <a:spcPts val="1000"/>
+              </a:spcAft>
+              <a:buSzPct val="100000"/>
+              <a:buChar char="•"/>
+              <a:lnSpc>
+                <a:spcPts val="2200"/>
+              </a:lnSpc>
+            </a:pPr>
+            <a:r>
+              <a:rPr sz="2000" b="0">
+                <a:solidFill>
+                  <a:srgbClr val="333333"/>
+                </a:solidFill>
+                <a:latin typeface="Calibri"/>
+              </a:rPr>
+              <a:t>Demonstrate one improve step from bad to golden</a:t>
+            </a:r>
+          </a:p>
+          <a:p>
+            <a:pPr lvl="0" marL="457200" indent="-228600">
+              <a:buFont typeface="Calibri"/>
+              <a:spcAft>
+                <a:spcPts val="1000"/>
+              </a:spcAft>
+              <a:buSzPct val="100000"/>
+              <a:buChar char="•"/>
+              <a:lnSpc>
+                <a:spcPts val="2200"/>
+              </a:lnSpc>
+            </a:pPr>
+            <a:r>
+              <a:rPr sz="2000" b="0">
+                <a:solidFill>
+                  <a:srgbClr val="333333"/>
+                </a:solidFill>
+                <a:latin typeface="Calibri"/>
+              </a:rPr>
+              <a:t>Next: soft module A reshaped from three by two to two by three</a:t>
+            </a:r>
+          </a:p>
+        </p:txBody>
+      </p:sp>
+      <p:sp>
+        <p:nvSpPr>
+          <p:cNvPr id="4" name="TextBox 3"/>
+          <p:cNvSpPr txBox="1"/>
+          <p:nvPr/>
+        </p:nvSpPr>
+        <p:spPr>
+          <a:xfrm>
+            <a:off x="548640" y="6355080"/>
+            <a:ext cx="11064240" cy="320040"/>
+          </a:xfrm>
+          <a:prstGeom prst="rect">
+            <a:avLst/>
+          </a:prstGeom>
+          <a:noFill/>
+        </p:spPr>
+        <p:txBody>
+          <a:bodyPr wrap="square">
+            <a:noAutofit/>
+          </a:bodyPr>
+          <a:lstStyle/>
+          <a:p>
+            <a:pPr algn="r">
+              <a:lnSpc>
+                <a:spcPts val="2200"/>
+              </a:lnSpc>
+              <a:defRPr sz="1000" b="0">
+                <a:solidFill>
+                  <a:srgbClr val="666666"/>
+                </a:solidFill>
+                <a:latin typeface="Calibri"/>
+              </a:defRPr>
+            </a:pPr>
+            <a:r>
+              <a:t>learn_floorplanning — 01 simulated annealing fp</a:t>
+            </a:r>
+          </a:p>
+        </p:txBody>
+      </p:sp>
+    </p:spTree>
+  </p:cSld>
+  <p:clrMapOvr>
+    <a:masterClrMapping/>
+  </p:clrMapOvr>
+</p:sld>
+</file>
+
 <file path=ppt/slides/slide2.xml><?xml version="1.0" encoding="utf-8"?>
+<p:sld xmlns:a="http://schemas.openxmlformats.org/drawingml/2006/main" xmlns:p="http://schemas.openxmlformats.org/presentationml/2006/main" xmlns:r="http://schemas.openxmlformats.org/officeDocument/2006/relationships">
+  <p:cSld>
+    <p:spTree>
+      <p:nvGrpSpPr>
+        <p:cNvPr id="1" name=""/>
+        <p:cNvGrpSpPr/>
+        <p:nvPr/>
+      </p:nvGrpSpPr>
+      <p:grpSpPr/>
+      <p:sp>
+        <p:nvSpPr>
+          <p:cNvPr id="2" name="TextBox 1"/>
+          <p:cNvSpPr txBox="1"/>
+          <p:nvPr/>
+        </p:nvSpPr>
+        <p:spPr>
+          <a:xfrm>
+            <a:off x="548640" y="411480"/>
+            <a:ext cx="11064240" cy="777240"/>
+          </a:xfrm>
+          <a:prstGeom prst="rect">
+            <a:avLst/>
+          </a:prstGeom>
+          <a:noFill/>
+        </p:spPr>
+        <p:txBody>
+          <a:bodyPr wrap="square">
+            <a:noAutofit/>
+          </a:bodyPr>
+          <a:lstStyle/>
+          <a:p>
+            <a:pPr>
+              <a:lnSpc>
+                <a:spcPts val="2200"/>
+              </a:lnSpc>
+            </a:pPr>
+            <a:r>
+              <a:rPr sz="2800" b="1">
+                <a:solidFill>
+                  <a:srgbClr val="1A1A2E"/>
+                </a:solidFill>
+                <a:latin typeface="Calibri"/>
+              </a:rPr>
+              <a:t>Pseudocode</a:t>
+            </a:r>
+          </a:p>
+        </p:txBody>
+      </p:sp>
+      <p:sp>
+        <p:nvSpPr>
+          <p:cNvPr id="3" name="TextBox 2"/>
+          <p:cNvSpPr txBox="1"/>
+          <p:nvPr/>
+        </p:nvSpPr>
+        <p:spPr>
+          <a:xfrm>
+            <a:off x="548640" y="1234440"/>
+            <a:ext cx="11064240" cy="4937760"/>
+          </a:xfrm>
+          <a:prstGeom prst="rect">
+            <a:avLst/>
+          </a:prstGeom>
+          <a:noFill/>
+        </p:spPr>
+        <p:txBody>
+          <a:bodyPr wrap="square">
+            <a:noAutofit/>
+          </a:bodyPr>
+          <a:lstStyle/>
+          <a:p>
+            <a:pPr lvl="0" marL="457200" indent="-228600">
+              <a:buFont typeface="Calibri"/>
+              <a:spcAft>
+                <a:spcPts val="1000"/>
+              </a:spcAft>
+              <a:buSzPct val="100000"/>
+              <a:buChar char="•"/>
+              <a:lnSpc>
+                <a:spcPts val="2200"/>
+              </a:lnSpc>
+            </a:pPr>
+            <a:r>
+              <a:rPr sz="2000" b="0">
+                <a:solidFill>
+                  <a:srgbClr val="333333"/>
+                </a:solidFill>
+                <a:latin typeface="Calibri"/>
+              </a:rPr>
+              <a:t>Floorplan annealing uses a cost that heavily penalizes illegality</a:t>
+            </a:r>
+          </a:p>
+          <a:p>
+            <a:pPr lvl="0" marL="457200" indent="-228600">
+              <a:buFont typeface="Calibri"/>
+              <a:spcAft>
+                <a:spcPts val="1000"/>
+              </a:spcAft>
+              <a:buSzPct val="100000"/>
+              <a:buChar char="•"/>
+              <a:lnSpc>
+                <a:spcPts val="2200"/>
+              </a:lnSpc>
+            </a:pPr>
+            <a:r>
+              <a:rPr sz="2000" b="0">
+                <a:solidFill>
+                  <a:srgbClr val="333333"/>
+                </a:solidFill>
+                <a:latin typeface="Calibri"/>
+              </a:rPr>
+              <a:t>Pseudocode proposes neighbors, accepts by Metropolis, and keeps the best legal iterate</a:t>
+            </a:r>
+          </a:p>
+          <a:p>
+            <a:pPr lvl="0" marL="457200" indent="-228600">
+              <a:buFont typeface="Calibri"/>
+              <a:spcAft>
+                <a:spcPts val="1000"/>
+              </a:spcAft>
+              <a:buSzPct val="100000"/>
+              <a:buChar char="•"/>
+              <a:lnSpc>
+                <a:spcPts val="2200"/>
+              </a:lnSpc>
+            </a:pPr>
+            <a:r>
+              <a:rPr sz="2000" b="0">
+                <a:solidFill>
+                  <a:srgbClr val="333333"/>
+                </a:solidFill>
+                <a:latin typeface="Calibri"/>
+              </a:rPr>
+              <a:t>Open this module's examples file and find the Pseudocode section</a:t>
+            </a:r>
+          </a:p>
+          <a:p>
+            <a:pPr lvl="0" marL="457200" indent="-228600">
+              <a:buFont typeface="Calibri"/>
+              <a:spcAft>
+                <a:spcPts val="1000"/>
+              </a:spcAft>
+              <a:buSzPct val="100000"/>
+              <a:buChar char="•"/>
+              <a:lnSpc>
+                <a:spcPts val="2200"/>
+              </a:lnSpc>
+            </a:pPr>
+            <a:r>
+              <a:rPr sz="2000" b="0">
+                <a:solidFill>
+                  <a:srgbClr val="333333"/>
+                </a:solidFill>
+                <a:latin typeface="Calibri"/>
+              </a:rPr>
+              <a:t>That written sketch is what you implement on the implement track and what the browser</a:t>
+            </a:r>
+          </a:p>
+        </p:txBody>
+      </p:sp>
+      <p:sp>
+        <p:nvSpPr>
+          <p:cNvPr id="4" name="TextBox 3"/>
+          <p:cNvSpPr txBox="1"/>
+          <p:nvPr/>
+        </p:nvSpPr>
+        <p:spPr>
+          <a:xfrm>
+            <a:off x="548640" y="6355080"/>
+            <a:ext cx="11064240" cy="320040"/>
+          </a:xfrm>
+          <a:prstGeom prst="rect">
+            <a:avLst/>
+          </a:prstGeom>
+          <a:noFill/>
+        </p:spPr>
+        <p:txBody>
+          <a:bodyPr wrap="square">
+            <a:noAutofit/>
+          </a:bodyPr>
+          <a:lstStyle/>
+          <a:p>
+            <a:pPr algn="r">
+              <a:lnSpc>
+                <a:spcPts val="2200"/>
+              </a:lnSpc>
+              <a:defRPr sz="1000" b="0">
+                <a:solidFill>
+                  <a:srgbClr val="666666"/>
+                </a:solidFill>
+                <a:latin typeface="Calibri"/>
+              </a:defRPr>
+            </a:pPr>
+            <a:r>
+              <a:t>learn_floorplanning — 01 simulated annealing fp</a:t>
+            </a:r>
+          </a:p>
+        </p:txBody>
+      </p:sp>
+    </p:spTree>
+  </p:cSld>
+  <p:clrMapOvr>
+    <a:masterClrMapping/>
+  </p:clrMapOvr>
+</p:sld>
+</file>
+
+<file path=ppt/slides/slide3.xml><?xml version="1.0" encoding="utf-8"?>
+<p:sld xmlns:a="http://schemas.openxmlformats.org/drawingml/2006/main" xmlns:p="http://schemas.openxmlformats.org/presentationml/2006/main" xmlns:r="http://schemas.openxmlformats.org/officeDocument/2006/relationships">
+  <p:cSld>
+    <p:spTree>
+      <p:nvGrpSpPr>
+        <p:cNvPr id="1" name=""/>
+        <p:cNvGrpSpPr/>
+        <p:nvPr/>
+      </p:nvGrpSpPr>
+      <p:grpSpPr/>
+      <p:sp>
+        <p:nvSpPr>
+          <p:cNvPr id="2" name="TextBox 1"/>
+          <p:cNvSpPr txBox="1"/>
+          <p:nvPr/>
+        </p:nvSpPr>
+        <p:spPr>
+          <a:xfrm>
+            <a:off x="548640" y="411480"/>
+            <a:ext cx="11064240" cy="777240"/>
+          </a:xfrm>
+          <a:prstGeom prst="rect">
+            <a:avLst/>
+          </a:prstGeom>
+          <a:noFill/>
+        </p:spPr>
+        <p:txBody>
+          <a:bodyPr wrap="square">
+            <a:noAutofit/>
+          </a:bodyPr>
+          <a:lstStyle/>
+          <a:p>
+            <a:pPr>
+              <a:lnSpc>
+                <a:spcPts val="2200"/>
+              </a:lnSpc>
+            </a:pPr>
+            <a:r>
+              <a:rPr sz="2800" b="1">
+                <a:solidFill>
+                  <a:srgbClr val="1A1A2E"/>
+                </a:solidFill>
+                <a:latin typeface="Calibri"/>
+              </a:rPr>
+              <a:t>Algorithm sketch</a:t>
+            </a:r>
+          </a:p>
+        </p:txBody>
+      </p:sp>
+      <p:sp>
+        <p:nvSpPr>
+          <p:cNvPr id="3" name="TextBox 2"/>
+          <p:cNvSpPr txBox="1"/>
+          <p:nvPr/>
+        </p:nvSpPr>
+        <p:spPr>
+          <a:xfrm>
+            <a:off x="548640" y="1234440"/>
+            <a:ext cx="11064240" cy="4937760"/>
+          </a:xfrm>
+          <a:prstGeom prst="rect">
+            <a:avLst/>
+          </a:prstGeom>
+          <a:noFill/>
+        </p:spPr>
+        <p:txBody>
+          <a:bodyPr wrap="square">
+            <a:noAutofit/>
+          </a:bodyPr>
+          <a:lstStyle/>
+          <a:p>
+            <a:pPr lvl="0" marL="457200" indent="-228600">
+              <a:buFont typeface="Calibri"/>
+              <a:spcAft>
+                <a:spcPts val="1000"/>
+              </a:spcAft>
+              <a:buSzPct val="100000"/>
+              <a:buChar char="•"/>
+              <a:lnSpc>
+                <a:spcPts val="2200"/>
+              </a:lnSpc>
+            </a:pPr>
+            <a:r>
+              <a:rPr sz="2000" b="0">
+                <a:solidFill>
+                  <a:srgbClr val="333333"/>
+                </a:solidFill>
+                <a:latin typeface="Calibri"/>
+              </a:rPr>
+              <a:t>Bad overflow seed costs about one thousand forty-four</a:t>
+            </a:r>
+          </a:p>
+          <a:p>
+            <a:pPr lvl="0" marL="457200" indent="-228600">
+              <a:buFont typeface="Calibri"/>
+              <a:spcAft>
+                <a:spcPts val="1000"/>
+              </a:spcAft>
+              <a:buSzPct val="100000"/>
+              <a:buChar char="•"/>
+              <a:lnSpc>
+                <a:spcPts val="2200"/>
+              </a:lnSpc>
+            </a:pPr>
+            <a:r>
+              <a:rPr sz="2000" b="0">
+                <a:solidFill>
+                  <a:srgbClr val="333333"/>
+                </a:solidFill>
+                <a:latin typeface="Calibri"/>
+              </a:rPr>
+              <a:t>Golden legal packing is about thirty-six</a:t>
+            </a:r>
+          </a:p>
+          <a:p>
+            <a:pPr lvl="0" marL="457200" indent="-228600">
+              <a:buFont typeface="Calibri"/>
+              <a:spcAft>
+                <a:spcPts val="1000"/>
+              </a:spcAft>
+              <a:buSzPct val="100000"/>
+              <a:buChar char="•"/>
+              <a:lnSpc>
+                <a:spcPts val="2200"/>
+              </a:lnSpc>
+            </a:pPr>
+            <a:r>
+              <a:rPr sz="2000" b="0">
+                <a:solidFill>
+                  <a:srgbClr val="333333"/>
+                </a:solidFill>
+                <a:latin typeface="Calibri"/>
+              </a:rPr>
+              <a:t>One teaching improve step replaces bad with golden</a:t>
+            </a:r>
+          </a:p>
+        </p:txBody>
+      </p:sp>
+      <p:sp>
+        <p:nvSpPr>
+          <p:cNvPr id="4" name="TextBox 3"/>
+          <p:cNvSpPr txBox="1"/>
+          <p:nvPr/>
+        </p:nvSpPr>
+        <p:spPr>
+          <a:xfrm>
+            <a:off x="548640" y="6355080"/>
+            <a:ext cx="11064240" cy="320040"/>
+          </a:xfrm>
+          <a:prstGeom prst="rect">
+            <a:avLst/>
+          </a:prstGeom>
+          <a:noFill/>
+        </p:spPr>
+        <p:txBody>
+          <a:bodyPr wrap="square">
+            <a:noAutofit/>
+          </a:bodyPr>
+          <a:lstStyle/>
+          <a:p>
+            <a:pPr algn="r">
+              <a:lnSpc>
+                <a:spcPts val="2200"/>
+              </a:lnSpc>
+              <a:defRPr sz="1000" b="0">
+                <a:solidFill>
+                  <a:srgbClr val="666666"/>
+                </a:solidFill>
+                <a:latin typeface="Calibri"/>
+              </a:defRPr>
+            </a:pPr>
+            <a:r>
+              <a:t>learn_floorplanning — 01 simulated annealing fp</a:t>
+            </a:r>
+          </a:p>
+        </p:txBody>
+      </p:sp>
+    </p:spTree>
+  </p:cSld>
+  <p:clrMapOvr>
+    <a:masterClrMapping/>
+  </p:clrMapOvr>
+</p:sld>
+</file>
+
+<file path=ppt/slides/slide4.xml><?xml version="1.0" encoding="utf-8"?>
+<p:sld xmlns:a="http://schemas.openxmlformats.org/drawingml/2006/main" xmlns:p="http://schemas.openxmlformats.org/presentationml/2006/main" xmlns:r="http://schemas.openxmlformats.org/officeDocument/2006/relationships">
+  <p:cSld>
+    <p:spTree>
+      <p:nvGrpSpPr>
+        <p:cNvPr id="1" name=""/>
+        <p:cNvGrpSpPr/>
+        <p:nvPr/>
+      </p:nvGrpSpPr>
+      <p:grpSpPr/>
+      <p:sp>
+        <p:nvSpPr>
+          <p:cNvPr id="2" name="TextBox 1"/>
+          <p:cNvSpPr txBox="1"/>
+          <p:nvPr/>
+        </p:nvSpPr>
+        <p:spPr>
+          <a:xfrm>
+            <a:off x="548640" y="411480"/>
+            <a:ext cx="11064240" cy="777240"/>
+          </a:xfrm>
+          <a:prstGeom prst="rect">
+            <a:avLst/>
+          </a:prstGeom>
+          <a:noFill/>
+        </p:spPr>
+        <p:txBody>
+          <a:bodyPr wrap="square">
+            <a:noAutofit/>
+          </a:bodyPr>
+          <a:lstStyle/>
+          <a:p>
+            <a:pPr>
+              <a:lnSpc>
+                <a:spcPts val="2200"/>
+              </a:lnSpc>
+            </a:pPr>
+            <a:r>
+              <a:rPr sz="2800" b="1">
+                <a:solidFill>
+                  <a:srgbClr val="1A1A2E"/>
+                </a:solidFill>
+                <a:latin typeface="Calibri"/>
+              </a:rPr>
+              <a:t>Algorithm sketch — try these</a:t>
+            </a:r>
+          </a:p>
+        </p:txBody>
+      </p:sp>
+      <p:sp>
+        <p:nvSpPr>
+          <p:cNvPr id="3" name="TextBox 2"/>
+          <p:cNvSpPr txBox="1"/>
+          <p:nvPr/>
+        </p:nvSpPr>
+        <p:spPr>
+          <a:xfrm>
+            <a:off x="548640" y="1143000"/>
+            <a:ext cx="11064240" cy="5029200"/>
+          </a:xfrm>
+          <a:prstGeom prst="rect">
+            <a:avLst/>
+          </a:prstGeom>
+          <a:solidFill>
+            <a:srgbClr val="F4F4F4"/>
+          </a:solidFill>
+        </p:spPr>
+        <p:txBody>
+          <a:bodyPr wrap="square">
+            <a:noAutofit/>
+          </a:bodyPr>
+          <a:lstStyle/>
+          <a:p>
+            <a:pPr>
+              <a:lnSpc>
+                <a:spcPts val="2200"/>
+              </a:lnSpc>
+              <a:spcAft>
+                <a:spcPts val="400"/>
+              </a:spcAft>
+            </a:pPr>
+            <a:r>
+              <a:rPr sz="2000" b="0">
+                <a:solidFill>
+                  <a:srgbClr val="333333"/>
+                </a:solidFill>
+                <a:latin typeface="Consolas"/>
+              </a:rPr>
+              <a:t>INPUT: pack / representation, T schedule</a:t>
+            </a:r>
+          </a:p>
+          <a:p>
+            <a:pPr>
+              <a:lnSpc>
+                <a:spcPts val="2200"/>
+              </a:lnSpc>
+              <a:spcAft>
+                <a:spcPts val="400"/>
+              </a:spcAft>
+            </a:pPr>
+            <a:r>
+              <a:rPr sz="2000" b="0">
+                <a:solidFill>
+                  <a:srgbClr val="333333"/>
+                </a:solidFill>
+                <a:latin typeface="Consolas"/>
+              </a:rPr>
+              <a:t>OUTPUT: best legal low-cost pack</a:t>
+            </a:r>
+          </a:p>
+          <a:p>
+            <a:pPr>
+              <a:lnSpc>
+                <a:spcPts val="2200"/>
+              </a:lnSpc>
+              <a:spcAft>
+                <a:spcPts val="400"/>
+              </a:spcAft>
+            </a:pPr>
+            <a:r>
+              <a:rPr sz="2000" b="0">
+                <a:solidFill>
+                  <a:srgbClr val="333333"/>
+                </a:solidFill>
+                <a:latin typeface="Consolas"/>
+              </a:rPr>
+              <a:t>cost ← 1000·¬legal + deadspace + α·HPWL</a:t>
+            </a:r>
+          </a:p>
+          <a:p>
+            <a:pPr>
+              <a:lnSpc>
+                <a:spcPts val="2200"/>
+              </a:lnSpc>
+              <a:spcAft>
+                <a:spcPts val="400"/>
+              </a:spcAft>
+            </a:pPr>
+            <a:r>
+              <a:rPr sz="2000" b="0">
+                <a:solidFill>
+                  <a:srgbClr val="333333"/>
+                </a:solidFill>
+                <a:latin typeface="Consolas"/>
+              </a:rPr>
+              <a:t>propose neighbor (swap/move/perturb)</a:t>
+            </a:r>
+          </a:p>
+          <a:p>
+            <a:pPr>
+              <a:lnSpc>
+                <a:spcPts val="2200"/>
+              </a:lnSpc>
+              <a:spcAft>
+                <a:spcPts val="400"/>
+              </a:spcAft>
+            </a:pPr>
+            <a:r>
+              <a:rPr sz="2000" b="0">
+                <a:solidFill>
+                  <a:srgbClr val="333333"/>
+                </a:solidFill>
+                <a:latin typeface="Consolas"/>
+              </a:rPr>
+              <a:t>accept if Δ&lt;0 or rand &lt; e^(−Δ/T)</a:t>
+            </a:r>
+          </a:p>
+          <a:p>
+            <a:pPr>
+              <a:lnSpc>
+                <a:spcPts val="2200"/>
+              </a:lnSpc>
+              <a:spcAft>
+                <a:spcPts val="400"/>
+              </a:spcAft>
+            </a:pPr>
+            <a:r>
+              <a:rPr sz="2000" b="0">
+                <a:solidFill>
+                  <a:srgbClr val="333333"/>
+                </a:solidFill>
+                <a:latin typeface="Consolas"/>
+              </a:rPr>
+              <a:t>keep best; cool T</a:t>
+            </a:r>
+          </a:p>
+          <a:p>
+            <a:pPr>
+              <a:lnSpc>
+                <a:spcPts val="2200"/>
+              </a:lnSpc>
+              <a:spcAft>
+                <a:spcPts val="400"/>
+              </a:spcAft>
+            </a:pPr>
+            <a:r>
+              <a:rPr sz="2000" b="0">
+                <a:solidFill>
+                  <a:srgbClr val="333333"/>
+                </a:solidFill>
+                <a:latin typeface="Consolas"/>
+              </a:rPr>
+              <a:t>GOLDEN legal cost≈36; bad≈1044</a:t>
+            </a:r>
+          </a:p>
+        </p:txBody>
+      </p:sp>
+      <p:sp>
+        <p:nvSpPr>
+          <p:cNvPr id="4" name="TextBox 3"/>
+          <p:cNvSpPr txBox="1"/>
+          <p:nvPr/>
+        </p:nvSpPr>
+        <p:spPr>
+          <a:xfrm>
+            <a:off x="548640" y="6355080"/>
+            <a:ext cx="11064240" cy="320040"/>
+          </a:xfrm>
+          <a:prstGeom prst="rect">
+            <a:avLst/>
+          </a:prstGeom>
+          <a:noFill/>
+        </p:spPr>
+        <p:txBody>
+          <a:bodyPr wrap="square">
+            <a:noAutofit/>
+          </a:bodyPr>
+          <a:lstStyle/>
+          <a:p>
+            <a:pPr algn="r">
+              <a:lnSpc>
+                <a:spcPts val="2200"/>
+              </a:lnSpc>
+              <a:defRPr sz="1000" b="0">
+                <a:solidFill>
+                  <a:srgbClr val="666666"/>
+                </a:solidFill>
+                <a:latin typeface="Calibri"/>
+              </a:defRPr>
+            </a:pPr>
+            <a:r>
+              <a:t>learn_floorplanning — 01 simulated annealing fp</a:t>
+            </a:r>
+          </a:p>
+        </p:txBody>
+      </p:sp>
+    </p:spTree>
+  </p:cSld>
+  <p:clrMapOvr>
+    <a:masterClrMapping/>
+  </p:clrMapOvr>
+</p:sld>
+</file>
+
+<file path=ppt/slides/slide5.xml><?xml version="1.0" encoding="utf-8"?>
 <p:sld xmlns:a="http://schemas.openxmlformats.org/drawingml/2006/main" xmlns:p="http://schemas.openxmlformats.org/presentationml/2006/main" xmlns:r="http://schemas.openxmlformats.org/officeDocument/2006/relationships">
   <p:cSld>
     <p:spTree>
@@ -4589,7 +5861,7 @@
 </p:sld>
 </file>
 
-<file path=ppt/slides/slide3.xml><?xml version="1.0" encoding="utf-8"?>
+<file path=ppt/slides/slide6.xml><?xml version="1.0" encoding="utf-8"?>
 <p:sld xmlns:a="http://schemas.openxmlformats.org/drawingml/2006/main" xmlns:p="http://schemas.openxmlformats.org/presentationml/2006/main" xmlns:r="http://schemas.openxmlformats.org/officeDocument/2006/relationships">
   <p:cSld>
     <p:spTree>
@@ -4748,7 +6020,7 @@
 </p:sld>
 </file>
 
-<file path=ppt/slides/slide4.xml><?xml version="1.0" encoding="utf-8"?>
+<file path=ppt/slides/slide7.xml><?xml version="1.0" encoding="utf-8"?>
 <p:sld xmlns:a="http://schemas.openxmlformats.org/drawingml/2006/main" xmlns:p="http://schemas.openxmlformats.org/presentationml/2006/main" xmlns:r="http://schemas.openxmlformats.org/officeDocument/2006/relationships">
   <p:cSld>
     <p:spTree>
@@ -4907,7 +6179,7 @@
 </p:sld>
 </file>
 
-<file path=ppt/slides/slide5.xml><?xml version="1.0" encoding="utf-8"?>
+<file path=ppt/slides/slide8.xml><?xml version="1.0" encoding="utf-8"?>
 <p:sld xmlns:a="http://schemas.openxmlformats.org/drawingml/2006/main" xmlns:p="http://schemas.openxmlformats.org/presentationml/2006/main" xmlns:r="http://schemas.openxmlformats.org/officeDocument/2006/relationships">
   <p:cSld>
     <p:spTree>
@@ -5066,7 +6338,7 @@
 </p:sld>
 </file>
 
-<file path=ppt/slides/slide6.xml><?xml version="1.0" encoding="utf-8"?>
+<file path=ppt/slides/slide9.xml><?xml version="1.0" encoding="utf-8"?>
 <p:sld xmlns:a="http://schemas.openxmlformats.org/drawingml/2006/main" xmlns:p="http://schemas.openxmlformats.org/presentationml/2006/main" xmlns:r="http://schemas.openxmlformats.org/officeDocument/2006/relationships">
   <p:cSld>
     <p:spTree>
@@ -5181,495 +6453,6 @@
       <p:sp>
         <p:nvSpPr>
           <p:cNvPr id="5" name="TextBox 4"/>
-          <p:cNvSpPr txBox="1"/>
-          <p:nvPr/>
-        </p:nvSpPr>
-        <p:spPr>
-          <a:xfrm>
-            <a:off x="548640" y="6355080"/>
-            <a:ext cx="11064240" cy="320040"/>
-          </a:xfrm>
-          <a:prstGeom prst="rect">
-            <a:avLst/>
-          </a:prstGeom>
-          <a:noFill/>
-        </p:spPr>
-        <p:txBody>
-          <a:bodyPr wrap="square">
-            <a:noAutofit/>
-          </a:bodyPr>
-          <a:lstStyle/>
-          <a:p>
-            <a:pPr algn="r">
-              <a:lnSpc>
-                <a:spcPts val="2200"/>
-              </a:lnSpc>
-              <a:defRPr sz="1000" b="0">
-                <a:solidFill>
-                  <a:srgbClr val="666666"/>
-                </a:solidFill>
-                <a:latin typeface="Calibri"/>
-              </a:defRPr>
-            </a:pPr>
-            <a:r>
-              <a:t>learn_floorplanning — 01 simulated annealing fp</a:t>
-            </a:r>
-          </a:p>
-        </p:txBody>
-      </p:sp>
-    </p:spTree>
-  </p:cSld>
-  <p:clrMapOvr>
-    <a:masterClrMapping/>
-  </p:clrMapOvr>
-</p:sld>
-</file>
-
-<file path=ppt/slides/slide7.xml><?xml version="1.0" encoding="utf-8"?>
-<p:sld xmlns:a="http://schemas.openxmlformats.org/drawingml/2006/main" xmlns:p="http://schemas.openxmlformats.org/presentationml/2006/main" xmlns:r="http://schemas.openxmlformats.org/officeDocument/2006/relationships">
-  <p:cSld>
-    <p:spTree>
-      <p:nvGrpSpPr>
-        <p:cNvPr id="1" name=""/>
-        <p:cNvGrpSpPr/>
-        <p:nvPr/>
-      </p:nvGrpSpPr>
-      <p:grpSpPr/>
-      <p:sp>
-        <p:nvSpPr>
-          <p:cNvPr id="2" name="TextBox 1"/>
-          <p:cNvSpPr txBox="1"/>
-          <p:nvPr/>
-        </p:nvSpPr>
-        <p:spPr>
-          <a:xfrm>
-            <a:off x="548640" y="411480"/>
-            <a:ext cx="11064240" cy="777240"/>
-          </a:xfrm>
-          <a:prstGeom prst="rect">
-            <a:avLst/>
-          </a:prstGeom>
-          <a:noFill/>
-        </p:spPr>
-        <p:txBody>
-          <a:bodyPr wrap="square">
-            <a:noAutofit/>
-          </a:bodyPr>
-          <a:lstStyle/>
-          <a:p>
-            <a:pPr>
-              <a:lnSpc>
-                <a:spcPts val="2200"/>
-              </a:lnSpc>
-            </a:pPr>
-            <a:r>
-              <a:rPr sz="2800" b="1">
-                <a:solidFill>
-                  <a:srgbClr val="1A1A2E"/>
-                </a:solidFill>
-                <a:latin typeface="Calibri"/>
-              </a:rPr>
-              <a:t>Browser lab track</a:t>
-            </a:r>
-          </a:p>
-        </p:txBody>
-      </p:sp>
-      <p:sp>
-        <p:nvSpPr>
-          <p:cNvPr id="3" name="TextBox 2"/>
-          <p:cNvSpPr txBox="1"/>
-          <p:nvPr/>
-        </p:nvSpPr>
-        <p:spPr>
-          <a:xfrm>
-            <a:off x="548640" y="1234440"/>
-            <a:ext cx="11064240" cy="4937760"/>
-          </a:xfrm>
-          <a:prstGeom prst="rect">
-            <a:avLst/>
-          </a:prstGeom>
-          <a:noFill/>
-        </p:spPr>
-        <p:txBody>
-          <a:bodyPr wrap="square">
-            <a:noAutofit/>
-          </a:bodyPr>
-          <a:lstStyle/>
-          <a:p>
-            <a:pPr lvl="0" marL="457200" indent="-228600">
-              <a:buFont typeface="Calibri"/>
-              <a:spcAft>
-                <a:spcPts val="1000"/>
-              </a:spcAft>
-              <a:buSzPct val="100000"/>
-              <a:buChar char="•"/>
-              <a:lnSpc>
-                <a:spcPts val="2200"/>
-              </a:lnSpc>
-            </a:pPr>
-            <a:r>
-              <a:rPr sz="2000" b="0">
-                <a:solidFill>
-                  <a:srgbClr val="333333"/>
-                </a:solidFill>
-                <a:latin typeface="Calibri"/>
-              </a:rPr>
-              <a:t>Open simulated-annealing-fp</a:t>
-            </a:r>
-          </a:p>
-          <a:p>
-            <a:pPr lvl="0" marL="457200" indent="-228600">
-              <a:buFont typeface="Calibri"/>
-              <a:spcAft>
-                <a:spcPts val="1000"/>
-              </a:spcAft>
-              <a:buSzPct val="100000"/>
-              <a:buChar char="•"/>
-              <a:lnSpc>
-                <a:spcPts val="2200"/>
-              </a:lnSpc>
-            </a:pPr>
-            <a:r>
-              <a:rPr sz="2000" b="0">
-                <a:solidFill>
-                  <a:srgbClr val="333333"/>
-                </a:solidFill>
-                <a:latin typeface="Calibri"/>
-              </a:rPr>
-              <a:t>Show bad, note cost at least one thousand</a:t>
-            </a:r>
-          </a:p>
-          <a:p>
-            <a:pPr lvl="0" marL="457200" indent="-228600">
-              <a:buFont typeface="Calibri"/>
-              <a:spcAft>
-                <a:spcPts val="1000"/>
-              </a:spcAft>
-              <a:buSzPct val="100000"/>
-              <a:buChar char="•"/>
-              <a:lnSpc>
-                <a:spcPts val="2200"/>
-              </a:lnSpc>
-            </a:pPr>
-            <a:r>
-              <a:rPr sz="2000" b="0">
-                <a:solidFill>
-                  <a:srgbClr val="333333"/>
-                </a:solidFill>
-                <a:latin typeface="Calibri"/>
-              </a:rPr>
-              <a:t>Show golden or Improve, cost drops below one thousand and legality becomes true</a:t>
-            </a:r>
-          </a:p>
-        </p:txBody>
-      </p:sp>
-      <p:sp>
-        <p:nvSpPr>
-          <p:cNvPr id="4" name="TextBox 3"/>
-          <p:cNvSpPr txBox="1"/>
-          <p:nvPr/>
-        </p:nvSpPr>
-        <p:spPr>
-          <a:xfrm>
-            <a:off x="548640" y="6355080"/>
-            <a:ext cx="11064240" cy="320040"/>
-          </a:xfrm>
-          <a:prstGeom prst="rect">
-            <a:avLst/>
-          </a:prstGeom>
-          <a:noFill/>
-        </p:spPr>
-        <p:txBody>
-          <a:bodyPr wrap="square">
-            <a:noAutofit/>
-          </a:bodyPr>
-          <a:lstStyle/>
-          <a:p>
-            <a:pPr algn="r">
-              <a:lnSpc>
-                <a:spcPts val="2200"/>
-              </a:lnSpc>
-              <a:defRPr sz="1000" b="0">
-                <a:solidFill>
-                  <a:srgbClr val="666666"/>
-                </a:solidFill>
-                <a:latin typeface="Calibri"/>
-              </a:defRPr>
-            </a:pPr>
-            <a:r>
-              <a:t>learn_floorplanning — 01 simulated annealing fp</a:t>
-            </a:r>
-          </a:p>
-        </p:txBody>
-      </p:sp>
-    </p:spTree>
-  </p:cSld>
-  <p:clrMapOvr>
-    <a:masterClrMapping/>
-  </p:clrMapOvr>
-</p:sld>
-</file>
-
-<file path=ppt/slides/slide8.xml><?xml version="1.0" encoding="utf-8"?>
-<p:sld xmlns:a="http://schemas.openxmlformats.org/drawingml/2006/main" xmlns:p="http://schemas.openxmlformats.org/presentationml/2006/main" xmlns:r="http://schemas.openxmlformats.org/officeDocument/2006/relationships">
-  <p:cSld>
-    <p:spTree>
-      <p:nvGrpSpPr>
-        <p:cNvPr id="1" name=""/>
-        <p:cNvGrpSpPr/>
-        <p:nvPr/>
-      </p:nvGrpSpPr>
-      <p:grpSpPr/>
-      <p:sp>
-        <p:nvSpPr>
-          <p:cNvPr id="2" name="TextBox 1"/>
-          <p:cNvSpPr txBox="1"/>
-          <p:nvPr/>
-        </p:nvSpPr>
-        <p:spPr>
-          <a:xfrm>
-            <a:off x="548640" y="411480"/>
-            <a:ext cx="11064240" cy="777240"/>
-          </a:xfrm>
-          <a:prstGeom prst="rect">
-            <a:avLst/>
-          </a:prstGeom>
-          <a:noFill/>
-        </p:spPr>
-        <p:txBody>
-          <a:bodyPr wrap="square">
-            <a:noAutofit/>
-          </a:bodyPr>
-          <a:lstStyle/>
-          <a:p>
-            <a:pPr>
-              <a:lnSpc>
-                <a:spcPts val="2200"/>
-              </a:lnSpc>
-            </a:pPr>
-            <a:r>
-              <a:rPr sz="2800" b="1">
-                <a:solidFill>
-                  <a:srgbClr val="1A1A2E"/>
-                </a:solidFill>
-                <a:latin typeface="Calibri"/>
-              </a:rPr>
-              <a:t>Implement track</a:t>
-            </a:r>
-          </a:p>
-        </p:txBody>
-      </p:sp>
-      <p:sp>
-        <p:nvSpPr>
-          <p:cNvPr id="3" name="TextBox 2"/>
-          <p:cNvSpPr txBox="1"/>
-          <p:nvPr/>
-        </p:nvSpPr>
-        <p:spPr>
-          <a:xfrm>
-            <a:off x="548640" y="1234440"/>
-            <a:ext cx="11064240" cy="4937760"/>
-          </a:xfrm>
-          <a:prstGeom prst="rect">
-            <a:avLst/>
-          </a:prstGeom>
-          <a:noFill/>
-        </p:spPr>
-        <p:txBody>
-          <a:bodyPr wrap="square">
-            <a:noAutofit/>
-          </a:bodyPr>
-          <a:lstStyle/>
-          <a:p>
-            <a:pPr lvl="0" marL="457200" indent="-228600">
-              <a:buFont typeface="Calibri"/>
-              <a:spcAft>
-                <a:spcPts val="1000"/>
-              </a:spcAft>
-              <a:buSzPct val="100000"/>
-              <a:buChar char="•"/>
-              <a:lnSpc>
-                <a:spcPts val="2200"/>
-              </a:lnSpc>
-            </a:pPr>
-            <a:r>
-              <a:rPr sz="2000" b="0">
-                <a:solidFill>
-                  <a:srgbClr val="333333"/>
-                </a:solidFill>
-                <a:latin typeface="Calibri"/>
-              </a:rPr>
-              <a:t>Implement cost with an illegality penalty, plus deadspace and HPWL terms</a:t>
-            </a:r>
-          </a:p>
-          <a:p>
-            <a:pPr lvl="0" marL="457200" indent="-228600">
-              <a:buFont typeface="Calibri"/>
-              <a:spcAft>
-                <a:spcPts val="1000"/>
-              </a:spcAft>
-              <a:buSzPct val="100000"/>
-              <a:buChar char="•"/>
-              <a:lnSpc>
-                <a:spcPts val="2200"/>
-              </a:lnSpc>
-            </a:pPr>
-            <a:r>
-              <a:rPr sz="2000" b="0">
-                <a:solidFill>
-                  <a:srgbClr val="333333"/>
-                </a:solidFill>
-                <a:latin typeface="Calibri"/>
-              </a:rPr>
-              <a:t>Assert cost(golden) is less than cost(bad), and saSwap only exchanges coordinates</a:t>
-            </a:r>
-          </a:p>
-        </p:txBody>
-      </p:sp>
-      <p:sp>
-        <p:nvSpPr>
-          <p:cNvPr id="4" name="TextBox 3"/>
-          <p:cNvSpPr txBox="1"/>
-          <p:nvPr/>
-        </p:nvSpPr>
-        <p:spPr>
-          <a:xfrm>
-            <a:off x="548640" y="6355080"/>
-            <a:ext cx="11064240" cy="320040"/>
-          </a:xfrm>
-          <a:prstGeom prst="rect">
-            <a:avLst/>
-          </a:prstGeom>
-          <a:noFill/>
-        </p:spPr>
-        <p:txBody>
-          <a:bodyPr wrap="square">
-            <a:noAutofit/>
-          </a:bodyPr>
-          <a:lstStyle/>
-          <a:p>
-            <a:pPr algn="r">
-              <a:lnSpc>
-                <a:spcPts val="2200"/>
-              </a:lnSpc>
-              <a:defRPr sz="1000" b="0">
-                <a:solidFill>
-                  <a:srgbClr val="666666"/>
-                </a:solidFill>
-                <a:latin typeface="Calibri"/>
-              </a:defRPr>
-            </a:pPr>
-            <a:r>
-              <a:t>learn_floorplanning — 01 simulated annealing fp</a:t>
-            </a:r>
-          </a:p>
-        </p:txBody>
-      </p:sp>
-    </p:spTree>
-  </p:cSld>
-  <p:clrMapOvr>
-    <a:masterClrMapping/>
-  </p:clrMapOvr>
-</p:sld>
-</file>
-
-<file path=ppt/slides/slide9.xml><?xml version="1.0" encoding="utf-8"?>
-<p:sld xmlns:a="http://schemas.openxmlformats.org/drawingml/2006/main" xmlns:p="http://schemas.openxmlformats.org/presentationml/2006/main" xmlns:r="http://schemas.openxmlformats.org/officeDocument/2006/relationships">
-  <p:cSld>
-    <p:spTree>
-      <p:nvGrpSpPr>
-        <p:cNvPr id="1" name=""/>
-        <p:cNvGrpSpPr/>
-        <p:nvPr/>
-      </p:nvGrpSpPr>
-      <p:grpSpPr/>
-      <p:sp>
-        <p:nvSpPr>
-          <p:cNvPr id="2" name="TextBox 1"/>
-          <p:cNvSpPr txBox="1"/>
-          <p:nvPr/>
-        </p:nvSpPr>
-        <p:spPr>
-          <a:xfrm>
-            <a:off x="548640" y="411480"/>
-            <a:ext cx="11064240" cy="777240"/>
-          </a:xfrm>
-          <a:prstGeom prst="rect">
-            <a:avLst/>
-          </a:prstGeom>
-          <a:noFill/>
-        </p:spPr>
-        <p:txBody>
-          <a:bodyPr wrap="square">
-            <a:noAutofit/>
-          </a:bodyPr>
-          <a:lstStyle/>
-          <a:p>
-            <a:pPr>
-              <a:lnSpc>
-                <a:spcPts val="2200"/>
-              </a:lnSpc>
-            </a:pPr>
-            <a:r>
-              <a:rPr sz="2800" b="1">
-                <a:solidFill>
-                  <a:srgbClr val="1A1A2E"/>
-                </a:solidFill>
-                <a:latin typeface="Calibri"/>
-              </a:rPr>
-              <a:t>Pitfalls</a:t>
-            </a:r>
-          </a:p>
-        </p:txBody>
-      </p:sp>
-      <p:sp>
-        <p:nvSpPr>
-          <p:cNvPr id="3" name="TextBox 2"/>
-          <p:cNvSpPr txBox="1"/>
-          <p:nvPr/>
-        </p:nvSpPr>
-        <p:spPr>
-          <a:xfrm>
-            <a:off x="548640" y="1234440"/>
-            <a:ext cx="11064240" cy="4937760"/>
-          </a:xfrm>
-          <a:prstGeom prst="rect">
-            <a:avLst/>
-          </a:prstGeom>
-          <a:noFill/>
-        </p:spPr>
-        <p:txBody>
-          <a:bodyPr wrap="square">
-            <a:noAutofit/>
-          </a:bodyPr>
-          <a:lstStyle/>
-          <a:p>
-            <a:pPr lvl="0" marL="457200" indent="-228600">
-              <a:buFont typeface="Calibri"/>
-              <a:spcAft>
-                <a:spcPts val="1000"/>
-              </a:spcAft>
-              <a:buSzPct val="100000"/>
-              <a:buChar char="•"/>
-              <a:lnSpc>
-                <a:spcPts val="2200"/>
-              </a:lnSpc>
-            </a:pPr>
-            <a:r>
-              <a:rPr sz="2000" b="0">
-                <a:solidFill>
-                  <a:srgbClr val="333333"/>
-                </a:solidFill>
-                <a:latin typeface="Calibri"/>
-              </a:rPr>
-              <a:t>Accepting illegal states without penalty</a:t>
-            </a:r>
-          </a:p>
-        </p:txBody>
-      </p:sp>
-      <p:sp>
-        <p:nvSpPr>
-          <p:cNvPr id="4" name="TextBox 3"/>
           <p:cNvSpPr txBox="1"/>
           <p:nvPr/>
         </p:nvSpPr>
